--- a/en/slides/09-Computer_Architecture-Boolean_Algebra_2.pptx
+++ b/en/slides/09-Computer_Architecture-Boolean_Algebra_2.pptx
@@ -126,13 +126,13 @@
   <p:extLst>
     <p:ext uri="{521415D9-36F7-43E2-AB2F-B90AF26B5E84}">
       <p14:sectionLst xmlns:p14="http://schemas.microsoft.com/office/powerpoint/2010/main">
-        <p14:section name="Opening" id="{8ee52cc8-748b-0433-15d3-36f2d380014d}">
+        <p14:section name="Opening" id="{4d2edef1-1189-105b-29d8-e09aa21faa55}">
           <p14:sldIdLst>
             <p14:sldId id="256"/>
             <p14:sldId id="257"/>
           </p14:sldIdLst>
         </p14:section>
-        <p14:section name="Boolean functions" id="{e6740d4c-9985-a9a7-4251-a1dce0c04fc3}">
+        <p14:section name="Boolean functions" id="{b9c5d9f5-629e-8393-7fde-d27c63515003}">
           <p14:sldIdLst>
             <p14:sldId id="258"/>
             <p14:sldId id="259"/>
@@ -142,14 +142,14 @@
             <p14:sldId id="263"/>
           </p14:sldIdLst>
         </p14:section>
-        <p14:section name="Canonical forms" id="{8315b7e3-8f2b-7ee3-50b2-e3bd1aeec80e}">
+        <p14:section name="Canonical forms" id="{ba3bd55a-a008-d90c-8fe0-e656b05b04b6}">
           <p14:sldIdLst>
             <p14:sldId id="264"/>
             <p14:sldId id="265"/>
             <p14:sldId id="266"/>
           </p14:sldIdLst>
         </p14:section>
-        <p14:section name="Karnaugh maps" id="{6c524565-8727-de30-5c65-705c0eb52b0b}">
+        <p14:section name="Karnaugh maps" id="{9421c978-de67-28a0-ed78-6f7f1e9ecf56}">
           <p14:sldIdLst>
             <p14:sldId id="267"/>
             <p14:sldId id="268"/>
@@ -157,7 +157,7 @@
             <p14:sldId id="270"/>
           </p14:sldIdLst>
         </p14:section>
-        <p14:section name="Back to the machine" id="{89028fbe-cd87-d53d-789f-f25822978874}">
+        <p14:section name="Back to the machine" id="{0f69457f-c62d-4538-f14c-0cdca973f03e}">
           <p14:sldIdLst>
             <p14:sldId id="271"/>
             <p14:sldId id="272"/>
@@ -3294,7 +3294,63 @@
       </p:sp>
       <p:sp>
         <p:nvSpPr>
-          <p:cNvPr id="12" name="Shape 10"/>
+          <p:cNvPr id="12" name="Text 10"/>
+          <p:cNvSpPr txBox="1"/>
+          <p:nvPr/>
+        </p:nvSpPr>
+        <p:spPr>
+          <a:xfrm>
+            <a:off x="4693615" y="566928"/>
+            <a:ext cx="6949440" cy="640080"/>
+          </a:xfrm>
+          <a:prstGeom prst="rect">
+            <a:avLst/>
+          </a:prstGeom>
+          <a:noFill/>
+          <a:ln/>
+        </p:spPr>
+        <p:txBody>
+          <a:bodyPr wrap="square" lIns="0" tIns="0" rIns="0" bIns="0" rtlCol="0" anchor="t"/>
+          <a:lstStyle/>
+          <a:p>
+            <a:pPr algn="r" indent="0" marL="0">
+              <a:buNone/>
+            </a:pPr>
+            <a:r>
+              <a:rPr lang="en-US" sz="1300" dirty="0">
+                <a:solidFill>
+                  <a:srgbClr val="CFE3EA"/>
+                </a:solidFill>
+                <a:latin typeface="Calibri" pitchFamily="34" charset="0"/>
+                <a:ea typeface="Calibri" pitchFamily="34" charset="-122"/>
+                <a:cs typeface="Calibri" pitchFamily="34" charset="-120"/>
+              </a:rPr>
+              <a:t>Lecture deck. The listings, the complete program and how to test it are in the code deck:</a:t>
+            </a:r>
+            <a:endParaRPr lang="en-US" sz="1300" dirty="0"/>
+          </a:p>
+          <a:p>
+            <a:pPr algn="r" indent="0" marL="0">
+              <a:buNone/>
+            </a:pPr>
+            <a:r>
+              <a:rPr lang="en-US" sz="1300" dirty="0">
+                <a:solidFill>
+                  <a:srgbClr val="CFE3EA"/>
+                </a:solidFill>
+                <a:latin typeface="Calibri" pitchFamily="34" charset="0"/>
+                <a:ea typeface="Calibri" pitchFamily="34" charset="-122"/>
+                <a:cs typeface="Calibri" pitchFamily="34" charset="-120"/>
+              </a:rPr>
+              <a:t>09-Computer_Architecture-Boolean_Algebra_2-Code.pptx</a:t>
+            </a:r>
+            <a:endParaRPr lang="en-US" sz="1300" dirty="0"/>
+          </a:p>
+        </p:txBody>
+      </p:sp>
+      <p:sp>
+        <p:nvSpPr>
+          <p:cNvPr id="13" name="Shape 11"/>
           <p:cNvSpPr/>
           <p:nvPr/>
         </p:nvSpPr>
@@ -3321,7 +3377,7 @@
       </p:sp>
       <p:pic>
         <p:nvPicPr>
-          <p:cNvPr id="13" name="Image 0" descr="/Users/raffaelemontella/devel/riscv-prg32/computer-architecture-with-prg32/tools/assets/game_tetris.png">    </p:cNvPr>
+          <p:cNvPr id="14" name="Image 0" descr="/Users/raffaelemontella/devel/riscv-prg32/computer-architecture-with-prg32/tools/assets/game_tetris.png">    </p:cNvPr>
           <p:cNvPicPr>
             <a:picLocks noChangeAspect="1"/>
           </p:cNvPicPr>

--- a/en/slides/09-Computer_Architecture-Boolean_Algebra_2.pptx
+++ b/en/slides/09-Computer_Architecture-Boolean_Algebra_2.pptx
@@ -126,13 +126,13 @@
   <p:extLst>
     <p:ext uri="{521415D9-36F7-43E2-AB2F-B90AF26B5E84}">
       <p14:sectionLst xmlns:p14="http://schemas.microsoft.com/office/powerpoint/2010/main">
-        <p14:section name="Opening" id="{4d2edef1-1189-105b-29d8-e09aa21faa55}">
+        <p14:section name="Opening" id="{f17bc709-5ce0-5d2c-1ca2-19745d2c6dc8}">
           <p14:sldIdLst>
             <p14:sldId id="256"/>
             <p14:sldId id="257"/>
           </p14:sldIdLst>
         </p14:section>
-        <p14:section name="Boolean functions" id="{b9c5d9f5-629e-8393-7fde-d27c63515003}">
+        <p14:section name="Boolean functions" id="{f7c60062-e2c4-c936-f11d-73bbc6e07350}">
           <p14:sldIdLst>
             <p14:sldId id="258"/>
             <p14:sldId id="259"/>
@@ -142,14 +142,14 @@
             <p14:sldId id="263"/>
           </p14:sldIdLst>
         </p14:section>
-        <p14:section name="Canonical forms" id="{ba3bd55a-a008-d90c-8fe0-e656b05b04b6}">
+        <p14:section name="Canonical forms" id="{cdfdba98-264d-5f04-6b21-dc387de1a467}">
           <p14:sldIdLst>
             <p14:sldId id="264"/>
             <p14:sldId id="265"/>
             <p14:sldId id="266"/>
           </p14:sldIdLst>
         </p14:section>
-        <p14:section name="Karnaugh maps" id="{9421c978-de67-28a0-ed78-6f7f1e9ecf56}">
+        <p14:section name="Karnaugh maps" id="{77d5b69d-a096-65ee-5780-16e18cf4a440}">
           <p14:sldIdLst>
             <p14:sldId id="267"/>
             <p14:sldId id="268"/>
@@ -157,7 +157,7 @@
             <p14:sldId id="270"/>
           </p14:sldIdLst>
         </p14:section>
-        <p14:section name="Back to the machine" id="{0f69457f-c62d-4538-f14c-0cdca973f03e}">
+        <p14:section name="Back to the machine" id="{f1351356-f94a-6ebe-e2b5-c081e36ad315}">
           <p14:sldIdLst>
             <p14:sldId id="271"/>
             <p14:sldId id="272"/>
@@ -571,6 +571,8 @@
             <a:r>
               <a:rPr lang="en-US" dirty="0"/>
               <a:t>The previous lecture gave you operators and properties. This one answers the practical question that follows: given what a circuit must do, how do you find the gates? The answer is a method in three steps, truth table, canonical form and minimisation, and you will apply it to the most important circuit of the course, the adder. The lecture opens with two instructions that add two bits, and it closes with the thirty-two adders that execute every add you have typed.
+Learning status: UNDERSTAND NOW, by the end of this lecture you explain it, trace it and apply it on your own; USE NOW, you follow and use the recipe today; how it works inside is explained later, or is not part of the course; UNDERSTAND LATER, recognise the name and what it is for; a later lecture explains it. A slide without a badge is context: a story, an example, a question, an exercise.
+Learning status of this lecture. UNDERSTAND NOW: the adder; Boolean functions; canonical forms; minimisation, Karnaugh maps. USE NOW: the complete program, the PRG32 tools (used, not studied, in this course). UNDERSTAND LATER: nothing. A slide without a badge is context: a story, an example, a question, an exercise.
 For the lecturer: Spiral: the lecture opens with two instructions that add two bits, shows that they are a half adder, then develops the method (truth table, canonical form, minimisation) that produces such circuits, and closes on the 32-bit adder behind the add instruction.</a:t>
             </a:r>
             <a:endParaRPr lang="en-US" dirty="0"/>
@@ -660,6 +662,7 @@
             <a:r>
               <a:rPr lang="en-US" dirty="0"/>
               <a:t>The recipe applied to F. For each row where F is 1, write its minterm; the OR of these minterms is the canonical form P: F is the sum of minterms 3, 4, 5, 6 and 7. For each row where F is 0, write its maxterm; the AND of these maxterms is the canonical form S: the product of maxterms 0, 1 and 2. Both expressions are correct and unique. Neither is economical: the first has five clauses and fifteen literals.
+UNDERSTAND NOW: canonical forms.
 For the lecturer: Every function has exactly one canonical form of each type (up to the order of the terms). This is synthesis by recipe: always possible, rarely economical.</a:t>
             </a:r>
             <a:endParaRPr lang="en-US" dirty="0"/>
@@ -749,6 +752,7 @@
             <a:r>
               <a:rPr lang="en-US" dirty="0"/>
               <a:t>The canonical form of F reduced step by step with the laws of Lecture 08. Collect A from four clauses; collect again inside the parenthesis; apply the complement law twice; finally apply the simplification x + x'y = x + y. Fifteen literals become three: F = A + BC. It works, but notice what the caption says: at each step you had to see which law to apply. For a larger function that is not practical. A method is needed that does not depend on inspiration.
+UNDERSTAND NOW: canonical forms.
 For the lecturer: From five AND gates with three inputs and a five-input OR, to one AND and one OR. The source deck called this an 'empirical' minimisation: it works, but which law to apply next is left to intuition. Karnaugh maps make it mechanical.</a:t>
             </a:r>
             <a:endParaRPr lang="en-US" dirty="0"/>
@@ -838,6 +842,7 @@
             <a:r>
               <a:rPr lang="en-US" dirty="0"/>
               <a:t>A Karnaugh map is the truth table redrawn as a grid, with one cell for each row. The essential point is the order of the cells: two neighbouring cells differ in the value of one variable only, which is why the columns are labelled 00, 01, 11, 10 and not in counting order. Because of this, two adjacent 1s can be merged into a single clause with one literal less. The rule: group the 1s in rectangles of 1, 2, 4 or 8 cells, as large as possible, until every 1 is covered. The left and right edges are adjacent too.
+UNDERSTAND NOW: minimisation, Karnaugh maps.
 For the lecturer: The order 00, 01, 11, 10 is a Gray code. Maurice Karnaugh, 1953. An online tool was suggested in the source deck (edutecnica.it/apps/k/k.htm).</a:t>
             </a:r>
             <a:endParaRPr lang="en-US" dirty="0"/>
@@ -927,6 +932,7 @@
             <a:r>
               <a:rPr lang="en-US" dirty="0"/>
               <a:t>The function F of the lecture on a map of three variables. Write 1 in the cells of minterms 3, 4, 5, 6 and 7. The red group takes the whole row A = 1, four cells: two variables change, B and C, and the clause is A. The violet group takes the column BC = 11: A changes, and the clause is BC. Every 1 is covered and no group can be enlarged: F = A + BC. It is the result of the algebraic minimisation, found by eye in a few seconds.
+UNDERSTAND NOW: minimisation, Karnaugh maps.
 For the lecturer: A group of 2^k cells eliminates k variables. Always take the largest groups first, then cover what is left.</a:t>
             </a:r>
             <a:endParaRPr lang="en-US" dirty="0"/>
@@ -1016,6 +1022,7 @@
             <a:r>
               <a:rPr lang="en-US" dirty="0"/>
               <a:t>With four variables the map has sixteen cells, and both pairs of labels follow the order 00, 01, 11, 10. The red group of four in the centre gives BD. The four corners form one group as well, because the map wraps around in both directions: imagine it drawn on the surface of a doughnut. In the corners B and D are both 0, so the clause is B'D'. The result has four literals instead of thirty-two. Always look at the edges and the corners before concluding that a 1 is isolated.
+UNDERSTAND NOW: minimisation, Karnaugh maps.
 For the lecturer: New slide. Think of the map as drawn on a torus: the top edge touches the bottom edge and the left edge touches the right edge.</a:t>
             </a:r>
             <a:endParaRPr lang="en-US" dirty="0"/>
@@ -1105,6 +1112,7 @@
             <a:r>
               <a:rPr lang="en-US" dirty="0"/>
               <a:t>Sometimes a combination of inputs can never occur, or the output does not matter when it does. A decimal digit coded on four bits uses only ten of the sixteen patterns: the other six never appear. Their cells are marked with an x, a don't care, and each x may be read as 1 or as 0, whichever is more convenient. Use an x as 1 when it lets you make a group larger; ignore it otherwise. More freedom means larger groups and a cheaper circuit.
+UNDERSTAND NOW: minimisation, Karnaugh maps.
 For the lecturer: New slide. Typical exam exercise: the seven-segment display decoder, where each segment is a function of four variables with six don't-cares.</a:t>
             </a:r>
             <a:endParaRPr lang="en-US" dirty="0"/>
@@ -1194,6 +1202,7 @@
             <a:r>
               <a:rPr lang="en-US" dirty="0"/>
               <a:t>Put thirty-two full adders in a row, one per bit position. Each receives one bit of A, one bit of B and the carry from the position on its right, and passes its own carry to the left: a ripple-carry adder. This is what executes add t2, t0, t1. The first carry in is 0. For a subtraction the same adder is used: the second operand is complemented and the first carry in is 1, which is the two's complement of Lecture 05. The carry out of the last position is simply dropped.
+UNDERSTAND NOW: the adder.
 For the lecturer: The carry out of bit 31 is the unsigned overflow of Lecture 05, which RISC-V simply drops. Real processors use faster carry schemes (carry look-ahead), but the function computed is the same.</a:t>
             </a:r>
             <a:endParaRPr lang="en-US" dirty="0"/>
@@ -1641,6 +1650,7 @@
             <a:r>
               <a:rPr lang="en-US" dirty="0"/>
               <a:t>Five conclusions. A Boolean function is a truth table, and a truth table always yields a canonical expression. Minimisation optimises the network to make it cheaper. Karnaugh maps turn the algebra into a picture: group the 1s and read the clauses. The half adder and the full adder are the first real circuits of the course. And thirty-two full adders in a row execute the add you typed in the first lecture. Next: what the gates themselves are made of.
+Learning status, recap. UNDERSTAND NOW: the adder; Boolean functions; canonical forms; minimisation, Karnaugh maps. USE NOW: the complete program, the PRG32 tools (used, not studied, in this course). UNDERSTAND LATER: nothing. A slide without a badge is context: a story, an example, a question, an exercise.
 For the lecturer: Next lecture: electronics, to see what these gates are made of; then combinational and sequential machines.</a:t>
             </a:r>
             <a:endParaRPr lang="en-US" dirty="0"/>
@@ -1730,6 +1740,7 @@
             <a:r>
               <a:rPr lang="en-US" dirty="0"/>
               <a:t>Three words. A literal is a variable or its complement as it appears in an expression: a, b', x. A clause, or product term, is a logical product of literals: a b' x. A factor, or sum term, is a logical sum of literals: (a + x'). The number of literals is a measure of the cost of an expression, because each occurrence of a variable is an input of some gate. You will count literals to compare two forms of the same function.
+UNDERSTAND NOW: Boolean functions.
 For the lecturer: Letterale; clausola o termine elementare; fattore elementare. Each occurrence of a variable counts as a literal: the number of literals measures the cost of an expression.</a:t>
             </a:r>
             <a:endParaRPr lang="en-US" dirty="0"/>
@@ -1819,6 +1830,7 @@
             <a:r>
               <a:rPr lang="en-US" dirty="0"/>
               <a:t>A Boolean function assigns a 0 or a 1 to each combination of its n inputs. The combinations are 2 to the n, and for each of them there are two possible outputs: so the functions are 2 to the power 2 to the n. With one variable there are 4, with two 16, with three 256, with four 65,536. The number is finite but grows extremely fast. The last line is the reason for studying all this: every digital circuit can be written as an expression, and every expression can be built as a circuit.
+UNDERSTAND NOW: Boolean functions.
 For the lecturer: f: B^n -&gt; B with B = {0, 1}. For n = 5 there are already more than four billion functions: 2^32.</a:t>
             </a:r>
             <a:endParaRPr lang="en-US" dirty="0"/>
@@ -1908,6 +1920,7 @@
             <a:r>
               <a:rPr lang="en-US" dirty="0"/>
               <a:t>All sixteen functions of two variables. Each row is a function, and the four middle columns are its outputs for the inputs 00, 01, 10 and 11; the number of the function is that column of outputs read as a binary number. Among them you recognise, highlighted, the gates of Lecture 08: AND is f1, XOR is f6, OR is f7, NOR is f8, XNOR is f9, NAND is f14. The others are the two constants, the two inputs passed unchanged, their negations, and four less common functions.
+UNDERSTAND NOW: Boolean functions.
 For the lecturer: f0 and f15: constants. f3, f5: identity (buffer). f12, f10: NOT. f1 AND, f7 OR, f6 XOR, f9 equivalence, f14 NAND, f8 NOR. f13 is the implication x -&gt; y, f11 is y -&gt; x; f2 and f4 are the inhibitions.</a:t>
             </a:r>
             <a:endParaRPr lang="en-US" dirty="0"/>
@@ -1997,6 +2010,7 @@
             <a:r>
               <a:rPr lang="en-US" dirty="0"/>
               <a:t>A set of operators is functionally complete if every Boolean function can be built with it. AND, OR and NOT are complete. By De Morgan's laws one of AND and OR can be obtained from the other with NOT, so two operators are enough. The surprising fact is the last one: NAND alone is complete, and so is NOR alone. A single type of gate is enough to build any digital circuit, a whole processor included; this is why NAND and NOR are called universal gates.
+UNDERSTAND NOW: Boolean functions.
 For the lecturer: NOT x = x NAND x; x AND y = (x NAND y) NAND (x NAND y); x OR y = (x NAND x) NAND (y NAND y). Real chips are largely built from NAND and NOR because they need the fewest transistors.</a:t>
             </a:r>
             <a:endParaRPr lang="en-US" dirty="0"/>
@@ -2086,6 +2100,7 @@
             <a:r>
               <a:rPr lang="en-US" dirty="0"/>
               <a:t>The half adder adds two bits A and B and produces a sum bit S and a carry C. From the table, S is 1 when the inputs are different, which is the XOR, and C is 1 when both are 1, which is the AND. The circuit on the right is exactly the two instructions of the warm-up. It is called "half" because it has no input for a carry coming from a previous position, so by itself it can only add the least significant bits of two numbers.
+UNDERSTAND NOW: the adder.
 For the lecturer: The circuit is exactly the two instructions of the warm-up. 'Half' because it has no carry input: it can only add the least significant bits.</a:t>
             </a:r>
             <a:endParaRPr lang="en-US" dirty="0"/>
@@ -2175,6 +2190,7 @@
             <a:r>
               <a:rPr lang="en-US" dirty="0"/>
               <a:t>The full adder has three inputs: the two bits A and B and a carry in. It produces a sum bit and a carry out. Read the table: S is 1 when an odd number of inputs is 1; the carry out is 1 when at least two inputs are 1. The circuit is made of two half adders and an OR: the first adds A and B, the second adds the carry in to their sum, and the OR combines the two possible carries. In the drawing, wires that cross without a dot are not connected.
+UNDERSTAND NOW: the adder.
 For the lecturer: Two half adders and an OR. S is 1 when an odd number of inputs is 1; Cout is 1 when at least two inputs are 1. Wires that cross without a dot are not connected.</a:t>
             </a:r>
             <a:endParaRPr lang="en-US" dirty="0"/>
@@ -2264,6 +2280,7 @@
             <a:r>
               <a:rPr lang="en-US" dirty="0"/>
               <a:t>A minterm is a product that contains every variable once, complemented or not. Its special property is that it is 1 for exactly one row of the truth table: a'b'c is 1 only when a is 0, b is 0 and c is 1. A maxterm is a sum that contains every variable once, and it is 0 for exactly one row. To write the minterm of a row, complement the variables that are 0 in that row; for the maxterm, complement those that are 1.
+UNDERSTAND NOW: canonical forms.
 For the lecturer: Mintermine (termine prodotto P); maxtermine (fattore somma S). Minterm i corresponds to row i: a variable appears complemented where the row has a 0.</a:t>
             </a:r>
             <a:endParaRPr lang="en-US" dirty="0"/>
@@ -3401,6 +3418,420 @@
       </p:pic>
       <p:sp>
         <p:nvSpPr>
+          <p:cNvPr id="15" name="Shape 12"/>
+          <p:cNvSpPr/>
+          <p:nvPr/>
+        </p:nvSpPr>
+        <p:spPr>
+          <a:xfrm>
+            <a:off x="9690303" y="91440"/>
+            <a:ext cx="1952752" cy="274320"/>
+          </a:xfrm>
+          <a:prstGeom prst="rect">
+            <a:avLst/>
+          </a:prstGeom>
+          <a:solidFill>
+            <a:srgbClr val="F3E8FF"/>
+          </a:solidFill>
+          <a:ln w="12700">
+            <a:solidFill>
+              <a:srgbClr val="7E22CE"/>
+            </a:solidFill>
+            <a:prstDash val="dash"/>
+          </a:ln>
+        </p:spPr>
+      </p:sp>
+      <p:sp>
+        <p:nvSpPr>
+          <p:cNvPr id="16" name="Shape 13"/>
+          <p:cNvSpPr/>
+          <p:nvPr/>
+        </p:nvSpPr>
+        <p:spPr>
+          <a:xfrm>
+            <a:off x="9717735" y="128016"/>
+            <a:ext cx="45720" cy="45720"/>
+          </a:xfrm>
+          <a:prstGeom prst="rect">
+            <a:avLst/>
+          </a:prstGeom>
+          <a:solidFill>
+            <a:srgbClr val="7E22CE"/>
+          </a:solidFill>
+          <a:ln w="12700">
+            <a:solidFill>
+              <a:srgbClr val="7E22CE"/>
+            </a:solidFill>
+            <a:prstDash val="solid"/>
+          </a:ln>
+        </p:spPr>
+      </p:sp>
+      <p:sp>
+        <p:nvSpPr>
+          <p:cNvPr id="17" name="Shape 14"/>
+          <p:cNvSpPr/>
+          <p:nvPr/>
+        </p:nvSpPr>
+        <p:spPr>
+          <a:xfrm>
+            <a:off x="9717735" y="205740"/>
+            <a:ext cx="45720" cy="45720"/>
+          </a:xfrm>
+          <a:prstGeom prst="rect">
+            <a:avLst/>
+          </a:prstGeom>
+          <a:solidFill>
+            <a:srgbClr val="7E22CE"/>
+          </a:solidFill>
+          <a:ln w="12700">
+            <a:solidFill>
+              <a:srgbClr val="7E22CE"/>
+            </a:solidFill>
+            <a:prstDash val="solid"/>
+          </a:ln>
+        </p:spPr>
+      </p:sp>
+      <p:sp>
+        <p:nvSpPr>
+          <p:cNvPr id="18" name="Shape 15"/>
+          <p:cNvSpPr/>
+          <p:nvPr/>
+        </p:nvSpPr>
+        <p:spPr>
+          <a:xfrm>
+            <a:off x="9717735" y="283464"/>
+            <a:ext cx="45720" cy="45720"/>
+          </a:xfrm>
+          <a:prstGeom prst="rect">
+            <a:avLst/>
+          </a:prstGeom>
+          <a:solidFill>
+            <a:srgbClr val="7E22CE"/>
+          </a:solidFill>
+          <a:ln w="12700">
+            <a:solidFill>
+              <a:srgbClr val="7E22CE"/>
+            </a:solidFill>
+            <a:prstDash val="solid"/>
+          </a:ln>
+        </p:spPr>
+      </p:sp>
+      <p:pic>
+        <p:nvPicPr>
+          <p:cNvPr id="19" name="Image 1" descr="preencoded.png">    </p:cNvPr>
+          <p:cNvPicPr>
+            <a:picLocks noChangeAspect="1"/>
+          </p:cNvPicPr>
+          <p:nvPr/>
+        </p:nvPicPr>
+        <p:blipFill>
+          <a:blip r:embed="rId2"/>
+          <a:stretch>
+            <a:fillRect/>
+          </a:stretch>
+        </p:blipFill>
+        <p:spPr>
+          <a:xfrm>
+            <a:off x="9818319" y="128016"/>
+            <a:ext cx="201168" cy="201168"/>
+          </a:xfrm>
+          <a:prstGeom prst="rect">
+            <a:avLst/>
+          </a:prstGeom>
+        </p:spPr>
+      </p:pic>
+      <p:sp>
+        <p:nvSpPr>
+          <p:cNvPr id="20" name="Text 16"/>
+          <p:cNvSpPr txBox="1"/>
+          <p:nvPr/>
+        </p:nvSpPr>
+        <p:spPr>
+          <a:xfrm>
+            <a:off x="10074351" y="91440"/>
+            <a:ext cx="1532128" cy="274320"/>
+          </a:xfrm>
+          <a:prstGeom prst="rect">
+            <a:avLst/>
+          </a:prstGeom>
+          <a:noFill/>
+          <a:ln/>
+        </p:spPr>
+        <p:txBody>
+          <a:bodyPr wrap="square" lIns="0" tIns="0" rIns="0" bIns="0" rtlCol="0" anchor="ctr"/>
+          <a:lstStyle/>
+          <a:p>
+            <a:pPr indent="0" marL="0">
+              <a:buNone/>
+            </a:pPr>
+            <a:r>
+              <a:rPr lang="en-US" sz="1100" b="1" dirty="0">
+                <a:solidFill>
+                  <a:srgbClr val="6B21A8"/>
+                </a:solidFill>
+                <a:latin typeface="Calibri" pitchFamily="34" charset="0"/>
+                <a:ea typeface="Calibri" pitchFamily="34" charset="-122"/>
+                <a:cs typeface="Calibri" pitchFamily="34" charset="-120"/>
+              </a:rPr>
+              <a:t>UNDERSTAND LATER</a:t>
+            </a:r>
+            <a:endParaRPr lang="en-US" sz="1100" dirty="0"/>
+          </a:p>
+        </p:txBody>
+      </p:sp>
+      <p:sp>
+        <p:nvSpPr>
+          <p:cNvPr id="21" name="Shape 17"/>
+          <p:cNvSpPr/>
+          <p:nvPr/>
+        </p:nvSpPr>
+        <p:spPr>
+          <a:xfrm>
+            <a:off x="8407349" y="91440"/>
+            <a:ext cx="1173226" cy="274320"/>
+          </a:xfrm>
+          <a:prstGeom prst="rect">
+            <a:avLst/>
+          </a:prstGeom>
+          <a:solidFill>
+            <a:srgbClr val="FEF3C7"/>
+          </a:solidFill>
+          <a:ln w="12700">
+            <a:solidFill>
+              <a:srgbClr val="B45309"/>
+            </a:solidFill>
+            <a:prstDash val="solid"/>
+          </a:ln>
+        </p:spPr>
+      </p:sp>
+      <p:sp>
+        <p:nvSpPr>
+          <p:cNvPr id="22" name="Shape 18"/>
+          <p:cNvSpPr/>
+          <p:nvPr/>
+        </p:nvSpPr>
+        <p:spPr>
+          <a:xfrm>
+            <a:off x="8407349" y="91440"/>
+            <a:ext cx="27432" cy="274320"/>
+          </a:xfrm>
+          <a:prstGeom prst="rect">
+            <a:avLst/>
+          </a:prstGeom>
+          <a:solidFill>
+            <a:srgbClr val="B45309"/>
+          </a:solidFill>
+          <a:ln w="12700">
+            <a:solidFill>
+              <a:srgbClr val="B45309"/>
+            </a:solidFill>
+            <a:prstDash val="solid"/>
+          </a:ln>
+        </p:spPr>
+      </p:sp>
+      <p:sp>
+        <p:nvSpPr>
+          <p:cNvPr id="23" name="Shape 19"/>
+          <p:cNvSpPr/>
+          <p:nvPr/>
+        </p:nvSpPr>
+        <p:spPr>
+          <a:xfrm>
+            <a:off x="8462213" y="91440"/>
+            <a:ext cx="27432" cy="274320"/>
+          </a:xfrm>
+          <a:prstGeom prst="rect">
+            <a:avLst/>
+          </a:prstGeom>
+          <a:solidFill>
+            <a:srgbClr val="B45309"/>
+          </a:solidFill>
+          <a:ln w="12700">
+            <a:solidFill>
+              <a:srgbClr val="B45309"/>
+            </a:solidFill>
+            <a:prstDash val="solid"/>
+          </a:ln>
+        </p:spPr>
+      </p:sp>
+      <p:pic>
+        <p:nvPicPr>
+          <p:cNvPr id="24" name="Image 2" descr="preencoded.png">    </p:cNvPr>
+          <p:cNvPicPr>
+            <a:picLocks noChangeAspect="1"/>
+          </p:cNvPicPr>
+          <p:nvPr/>
+        </p:nvPicPr>
+        <p:blipFill>
+          <a:blip r:embed="rId3"/>
+          <a:stretch>
+            <a:fillRect/>
+          </a:stretch>
+        </p:blipFill>
+        <p:spPr>
+          <a:xfrm>
+            <a:off x="8535365" y="128016"/>
+            <a:ext cx="201168" cy="201168"/>
+          </a:xfrm>
+          <a:prstGeom prst="rect">
+            <a:avLst/>
+          </a:prstGeom>
+        </p:spPr>
+      </p:pic>
+      <p:sp>
+        <p:nvSpPr>
+          <p:cNvPr id="25" name="Text 20"/>
+          <p:cNvSpPr txBox="1"/>
+          <p:nvPr/>
+        </p:nvSpPr>
+        <p:spPr>
+          <a:xfrm>
+            <a:off x="8791397" y="91440"/>
+            <a:ext cx="752602" cy="274320"/>
+          </a:xfrm>
+          <a:prstGeom prst="rect">
+            <a:avLst/>
+          </a:prstGeom>
+          <a:noFill/>
+          <a:ln/>
+        </p:spPr>
+        <p:txBody>
+          <a:bodyPr wrap="square" lIns="0" tIns="0" rIns="0" bIns="0" rtlCol="0" anchor="ctr"/>
+          <a:lstStyle/>
+          <a:p>
+            <a:pPr indent="0" marL="0">
+              <a:buNone/>
+            </a:pPr>
+            <a:r>
+              <a:rPr lang="en-US" sz="1100" b="1" dirty="0">
+                <a:solidFill>
+                  <a:srgbClr val="92400E"/>
+                </a:solidFill>
+                <a:latin typeface="Calibri" pitchFamily="34" charset="0"/>
+                <a:ea typeface="Calibri" pitchFamily="34" charset="-122"/>
+                <a:cs typeface="Calibri" pitchFamily="34" charset="-120"/>
+              </a:rPr>
+              <a:t>USE NOW</a:t>
+            </a:r>
+            <a:endParaRPr lang="en-US" sz="1100" dirty="0"/>
+          </a:p>
+        </p:txBody>
+      </p:sp>
+      <p:sp>
+        <p:nvSpPr>
+          <p:cNvPr id="26" name="Shape 21"/>
+          <p:cNvSpPr/>
+          <p:nvPr/>
+        </p:nvSpPr>
+        <p:spPr>
+          <a:xfrm>
+            <a:off x="6518097" y="91440"/>
+            <a:ext cx="1779524" cy="274320"/>
+          </a:xfrm>
+          <a:prstGeom prst="rect">
+            <a:avLst/>
+          </a:prstGeom>
+          <a:solidFill>
+            <a:srgbClr val="E0F2FE"/>
+          </a:solidFill>
+          <a:ln w="12700">
+            <a:solidFill>
+              <a:srgbClr val="0369A1"/>
+            </a:solidFill>
+            <a:prstDash val="solid"/>
+          </a:ln>
+        </p:spPr>
+      </p:sp>
+      <p:sp>
+        <p:nvSpPr>
+          <p:cNvPr id="27" name="Shape 22"/>
+          <p:cNvSpPr/>
+          <p:nvPr/>
+        </p:nvSpPr>
+        <p:spPr>
+          <a:xfrm>
+            <a:off x="6518097" y="91440"/>
+            <a:ext cx="73152" cy="274320"/>
+          </a:xfrm>
+          <a:prstGeom prst="rect">
+            <a:avLst/>
+          </a:prstGeom>
+          <a:solidFill>
+            <a:srgbClr val="0369A1"/>
+          </a:solidFill>
+          <a:ln w="12700">
+            <a:solidFill>
+              <a:srgbClr val="0369A1"/>
+            </a:solidFill>
+            <a:prstDash val="solid"/>
+          </a:ln>
+        </p:spPr>
+      </p:sp>
+      <p:pic>
+        <p:nvPicPr>
+          <p:cNvPr id="28" name="Image 3" descr="preencoded.png">    </p:cNvPr>
+          <p:cNvPicPr>
+            <a:picLocks noChangeAspect="1"/>
+          </p:cNvPicPr>
+          <p:nvPr/>
+        </p:nvPicPr>
+        <p:blipFill>
+          <a:blip r:embed="rId4"/>
+          <a:stretch>
+            <a:fillRect/>
+          </a:stretch>
+        </p:blipFill>
+        <p:spPr>
+          <a:xfrm>
+            <a:off x="6646113" y="128016"/>
+            <a:ext cx="201168" cy="201168"/>
+          </a:xfrm>
+          <a:prstGeom prst="rect">
+            <a:avLst/>
+          </a:prstGeom>
+        </p:spPr>
+      </p:pic>
+      <p:sp>
+        <p:nvSpPr>
+          <p:cNvPr id="29" name="Text 23"/>
+          <p:cNvSpPr txBox="1"/>
+          <p:nvPr/>
+        </p:nvSpPr>
+        <p:spPr>
+          <a:xfrm>
+            <a:off x="6902145" y="91440"/>
+            <a:ext cx="1358900" cy="274320"/>
+          </a:xfrm>
+          <a:prstGeom prst="rect">
+            <a:avLst/>
+          </a:prstGeom>
+          <a:noFill/>
+          <a:ln/>
+        </p:spPr>
+        <p:txBody>
+          <a:bodyPr wrap="square" lIns="0" tIns="0" rIns="0" bIns="0" rtlCol="0" anchor="ctr"/>
+          <a:lstStyle/>
+          <a:p>
+            <a:pPr indent="0" marL="0">
+              <a:buNone/>
+            </a:pPr>
+            <a:r>
+              <a:rPr lang="en-US" sz="1100" b="1" dirty="0">
+                <a:solidFill>
+                  <a:srgbClr val="075985"/>
+                </a:solidFill>
+                <a:latin typeface="Calibri" pitchFamily="34" charset="0"/>
+                <a:ea typeface="Calibri" pitchFamily="34" charset="-122"/>
+                <a:cs typeface="Calibri" pitchFamily="34" charset="-120"/>
+              </a:rPr>
+              <a:t>UNDERSTAND NOW</a:t>
+            </a:r>
+            <a:endParaRPr lang="en-US" sz="1100" dirty="0"/>
+          </a:p>
+        </p:txBody>
+      </p:sp>
+      <p:sp>
+        <p:nvSpPr>
           <p:cNvPr id="25" name="Slide Number Placeholder 0"/>
           <p:cNvSpPr>
             <a:spLocks noGrp="1"/>
@@ -7439,6 +7870,133 @@
       </p:sp>
       <p:sp>
         <p:nvSpPr>
+          <p:cNvPr id="12" name="Shape 9"/>
+          <p:cNvSpPr/>
+          <p:nvPr/>
+        </p:nvSpPr>
+        <p:spPr>
+          <a:xfrm>
+            <a:off x="8681669" y="91440"/>
+            <a:ext cx="2961386" cy="274320"/>
+          </a:xfrm>
+          <a:prstGeom prst="rect">
+            <a:avLst/>
+          </a:prstGeom>
+          <a:solidFill>
+            <a:srgbClr val="E0F2FE"/>
+          </a:solidFill>
+          <a:ln w="12700">
+            <a:solidFill>
+              <a:srgbClr val="0369A1"/>
+            </a:solidFill>
+            <a:prstDash val="solid"/>
+          </a:ln>
+        </p:spPr>
+      </p:sp>
+      <p:sp>
+        <p:nvSpPr>
+          <p:cNvPr id="13" name="Shape 10"/>
+          <p:cNvSpPr/>
+          <p:nvPr/>
+        </p:nvSpPr>
+        <p:spPr>
+          <a:xfrm>
+            <a:off x="8681669" y="91440"/>
+            <a:ext cx="73152" cy="274320"/>
+          </a:xfrm>
+          <a:prstGeom prst="rect">
+            <a:avLst/>
+          </a:prstGeom>
+          <a:solidFill>
+            <a:srgbClr val="0369A1"/>
+          </a:solidFill>
+          <a:ln w="12700">
+            <a:solidFill>
+              <a:srgbClr val="0369A1"/>
+            </a:solidFill>
+            <a:prstDash val="solid"/>
+          </a:ln>
+        </p:spPr>
+      </p:sp>
+      <p:pic>
+        <p:nvPicPr>
+          <p:cNvPr id="14" name="Image 0" descr="preencoded.png">    </p:cNvPr>
+          <p:cNvPicPr>
+            <a:picLocks noChangeAspect="1"/>
+          </p:cNvPicPr>
+          <p:nvPr/>
+        </p:nvPicPr>
+        <p:blipFill>
+          <a:blip r:embed="rId1"/>
+          <a:stretch>
+            <a:fillRect/>
+          </a:stretch>
+        </p:blipFill>
+        <p:spPr>
+          <a:xfrm>
+            <a:off x="8809685" y="128016"/>
+            <a:ext cx="201168" cy="201168"/>
+          </a:xfrm>
+          <a:prstGeom prst="rect">
+            <a:avLst/>
+          </a:prstGeom>
+        </p:spPr>
+      </p:pic>
+      <p:sp>
+        <p:nvSpPr>
+          <p:cNvPr id="15" name="Text 11"/>
+          <p:cNvSpPr txBox="1"/>
+          <p:nvPr/>
+        </p:nvSpPr>
+        <p:spPr>
+          <a:xfrm>
+            <a:off x="9065717" y="91440"/>
+            <a:ext cx="2540762" cy="274320"/>
+          </a:xfrm>
+          <a:prstGeom prst="rect">
+            <a:avLst/>
+          </a:prstGeom>
+          <a:noFill/>
+          <a:ln/>
+        </p:spPr>
+        <p:txBody>
+          <a:bodyPr wrap="square" lIns="0" tIns="0" rIns="0" bIns="0" rtlCol="0" anchor="ctr"/>
+          <a:lstStyle/>
+          <a:p>
+            <a:pPr indent="0" marL="0">
+              <a:buNone/>
+            </a:pPr>
+            <a:r>
+              <a:rPr lang="en-US" sz="1100" b="1" dirty="0">
+                <a:solidFill>
+                  <a:srgbClr val="075985"/>
+                </a:solidFill>
+                <a:latin typeface="Calibri" pitchFamily="34" charset="0"/>
+                <a:ea typeface="Calibri" pitchFamily="34" charset="-122"/>
+                <a:cs typeface="Calibri" pitchFamily="34" charset="-120"/>
+              </a:rPr>
+              <a:t>UNDERSTAND NOW</a:t>
+            </a:r>
+            <a:pPr indent="0" marL="0">
+              <a:buNone/>
+            </a:pPr>
+            <a:r>
+              <a:rPr lang="en-US" sz="1100" dirty="0">
+                <a:solidFill>
+                  <a:srgbClr val="075985"/>
+                </a:solidFill>
+                <a:latin typeface="Calibri" pitchFamily="34" charset="0"/>
+                <a:ea typeface="Calibri" pitchFamily="34" charset="-122"/>
+                <a:cs typeface="Calibri" pitchFamily="34" charset="-120"/>
+              </a:rPr>
+              <a:t> · canonical forms</a:t>
+            </a:r>
+            <a:endParaRPr lang="en-US" sz="1100" dirty="0"/>
+          </a:p>
+        </p:txBody>
+      </p:sp>
+      <p:sp>
+        <p:nvSpPr>
           <p:cNvPr id="25" name="Slide Number Placeholder 0"/>
           <p:cNvSpPr>
             <a:spLocks noGrp="1"/>
@@ -8588,6 +9146,133 @@
       </p:sp>
       <p:sp>
         <p:nvSpPr>
+          <p:cNvPr id="5" name="Shape 2"/>
+          <p:cNvSpPr/>
+          <p:nvPr/>
+        </p:nvSpPr>
+        <p:spPr>
+          <a:xfrm>
+            <a:off x="8681669" y="91440"/>
+            <a:ext cx="2961386" cy="274320"/>
+          </a:xfrm>
+          <a:prstGeom prst="rect">
+            <a:avLst/>
+          </a:prstGeom>
+          <a:solidFill>
+            <a:srgbClr val="E0F2FE"/>
+          </a:solidFill>
+          <a:ln w="12700">
+            <a:solidFill>
+              <a:srgbClr val="0369A1"/>
+            </a:solidFill>
+            <a:prstDash val="solid"/>
+          </a:ln>
+        </p:spPr>
+      </p:sp>
+      <p:sp>
+        <p:nvSpPr>
+          <p:cNvPr id="6" name="Shape 3"/>
+          <p:cNvSpPr/>
+          <p:nvPr/>
+        </p:nvSpPr>
+        <p:spPr>
+          <a:xfrm>
+            <a:off x="8681669" y="91440"/>
+            <a:ext cx="73152" cy="274320"/>
+          </a:xfrm>
+          <a:prstGeom prst="rect">
+            <a:avLst/>
+          </a:prstGeom>
+          <a:solidFill>
+            <a:srgbClr val="0369A1"/>
+          </a:solidFill>
+          <a:ln w="12700">
+            <a:solidFill>
+              <a:srgbClr val="0369A1"/>
+            </a:solidFill>
+            <a:prstDash val="solid"/>
+          </a:ln>
+        </p:spPr>
+      </p:sp>
+      <p:pic>
+        <p:nvPicPr>
+          <p:cNvPr id="7" name="Image 0" descr="preencoded.png">    </p:cNvPr>
+          <p:cNvPicPr>
+            <a:picLocks noChangeAspect="1"/>
+          </p:cNvPicPr>
+          <p:nvPr/>
+        </p:nvPicPr>
+        <p:blipFill>
+          <a:blip r:embed="rId1"/>
+          <a:stretch>
+            <a:fillRect/>
+          </a:stretch>
+        </p:blipFill>
+        <p:spPr>
+          <a:xfrm>
+            <a:off x="8809685" y="128016"/>
+            <a:ext cx="201168" cy="201168"/>
+          </a:xfrm>
+          <a:prstGeom prst="rect">
+            <a:avLst/>
+          </a:prstGeom>
+        </p:spPr>
+      </p:pic>
+      <p:sp>
+        <p:nvSpPr>
+          <p:cNvPr id="8" name="Text 4"/>
+          <p:cNvSpPr txBox="1"/>
+          <p:nvPr/>
+        </p:nvSpPr>
+        <p:spPr>
+          <a:xfrm>
+            <a:off x="9065717" y="91440"/>
+            <a:ext cx="2540762" cy="274320"/>
+          </a:xfrm>
+          <a:prstGeom prst="rect">
+            <a:avLst/>
+          </a:prstGeom>
+          <a:noFill/>
+          <a:ln/>
+        </p:spPr>
+        <p:txBody>
+          <a:bodyPr wrap="square" lIns="0" tIns="0" rIns="0" bIns="0" rtlCol="0" anchor="ctr"/>
+          <a:lstStyle/>
+          <a:p>
+            <a:pPr indent="0" marL="0">
+              <a:buNone/>
+            </a:pPr>
+            <a:r>
+              <a:rPr lang="en-US" sz="1100" b="1" dirty="0">
+                <a:solidFill>
+                  <a:srgbClr val="075985"/>
+                </a:solidFill>
+                <a:latin typeface="Calibri" pitchFamily="34" charset="0"/>
+                <a:ea typeface="Calibri" pitchFamily="34" charset="-122"/>
+                <a:cs typeface="Calibri" pitchFamily="34" charset="-120"/>
+              </a:rPr>
+              <a:t>UNDERSTAND NOW</a:t>
+            </a:r>
+            <a:pPr indent="0" marL="0">
+              <a:buNone/>
+            </a:pPr>
+            <a:r>
+              <a:rPr lang="en-US" sz="1100" dirty="0">
+                <a:solidFill>
+                  <a:srgbClr val="075985"/>
+                </a:solidFill>
+                <a:latin typeface="Calibri" pitchFamily="34" charset="0"/>
+                <a:ea typeface="Calibri" pitchFamily="34" charset="-122"/>
+                <a:cs typeface="Calibri" pitchFamily="34" charset="-120"/>
+              </a:rPr>
+              <a:t> · canonical forms</a:t>
+            </a:r>
+            <a:endParaRPr lang="en-US" sz="1100" dirty="0"/>
+          </a:p>
+        </p:txBody>
+      </p:sp>
+      <p:sp>
+        <p:nvSpPr>
           <p:cNvPr id="25" name="Slide Number Placeholder 0"/>
           <p:cNvSpPr>
             <a:spLocks noGrp="1"/>
@@ -9795,6 +10480,133 @@
       </p:sp>
       <p:sp>
         <p:nvSpPr>
+          <p:cNvPr id="31" name="Shape 29"/>
+          <p:cNvSpPr/>
+          <p:nvPr/>
+        </p:nvSpPr>
+        <p:spPr>
+          <a:xfrm>
+            <a:off x="7893761" y="91440"/>
+            <a:ext cx="3749294" cy="274320"/>
+          </a:xfrm>
+          <a:prstGeom prst="rect">
+            <a:avLst/>
+          </a:prstGeom>
+          <a:solidFill>
+            <a:srgbClr val="E0F2FE"/>
+          </a:solidFill>
+          <a:ln w="12700">
+            <a:solidFill>
+              <a:srgbClr val="0369A1"/>
+            </a:solidFill>
+            <a:prstDash val="solid"/>
+          </a:ln>
+        </p:spPr>
+      </p:sp>
+      <p:sp>
+        <p:nvSpPr>
+          <p:cNvPr id="32" name="Shape 30"/>
+          <p:cNvSpPr/>
+          <p:nvPr/>
+        </p:nvSpPr>
+        <p:spPr>
+          <a:xfrm>
+            <a:off x="7893761" y="91440"/>
+            <a:ext cx="73152" cy="274320"/>
+          </a:xfrm>
+          <a:prstGeom prst="rect">
+            <a:avLst/>
+          </a:prstGeom>
+          <a:solidFill>
+            <a:srgbClr val="0369A1"/>
+          </a:solidFill>
+          <a:ln w="12700">
+            <a:solidFill>
+              <a:srgbClr val="0369A1"/>
+            </a:solidFill>
+            <a:prstDash val="solid"/>
+          </a:ln>
+        </p:spPr>
+      </p:sp>
+      <p:pic>
+        <p:nvPicPr>
+          <p:cNvPr id="33" name="Image 0" descr="preencoded.png">    </p:cNvPr>
+          <p:cNvPicPr>
+            <a:picLocks noChangeAspect="1"/>
+          </p:cNvPicPr>
+          <p:nvPr/>
+        </p:nvPicPr>
+        <p:blipFill>
+          <a:blip r:embed="rId1"/>
+          <a:stretch>
+            <a:fillRect/>
+          </a:stretch>
+        </p:blipFill>
+        <p:spPr>
+          <a:xfrm>
+            <a:off x="8021777" y="128016"/>
+            <a:ext cx="201168" cy="201168"/>
+          </a:xfrm>
+          <a:prstGeom prst="rect">
+            <a:avLst/>
+          </a:prstGeom>
+        </p:spPr>
+      </p:pic>
+      <p:sp>
+        <p:nvSpPr>
+          <p:cNvPr id="34" name="Text 31"/>
+          <p:cNvSpPr txBox="1"/>
+          <p:nvPr/>
+        </p:nvSpPr>
+        <p:spPr>
+          <a:xfrm>
+            <a:off x="8277809" y="91440"/>
+            <a:ext cx="3328670" cy="274320"/>
+          </a:xfrm>
+          <a:prstGeom prst="rect">
+            <a:avLst/>
+          </a:prstGeom>
+          <a:noFill/>
+          <a:ln/>
+        </p:spPr>
+        <p:txBody>
+          <a:bodyPr wrap="square" lIns="0" tIns="0" rIns="0" bIns="0" rtlCol="0" anchor="ctr"/>
+          <a:lstStyle/>
+          <a:p>
+            <a:pPr indent="0" marL="0">
+              <a:buNone/>
+            </a:pPr>
+            <a:r>
+              <a:rPr lang="en-US" sz="1100" b="1" dirty="0">
+                <a:solidFill>
+                  <a:srgbClr val="075985"/>
+                </a:solidFill>
+                <a:latin typeface="Calibri" pitchFamily="34" charset="0"/>
+                <a:ea typeface="Calibri" pitchFamily="34" charset="-122"/>
+                <a:cs typeface="Calibri" pitchFamily="34" charset="-120"/>
+              </a:rPr>
+              <a:t>UNDERSTAND NOW</a:t>
+            </a:r>
+            <a:pPr indent="0" marL="0">
+              <a:buNone/>
+            </a:pPr>
+            <a:r>
+              <a:rPr lang="en-US" sz="1100" dirty="0">
+                <a:solidFill>
+                  <a:srgbClr val="075985"/>
+                </a:solidFill>
+                <a:latin typeface="Calibri" pitchFamily="34" charset="0"/>
+                <a:ea typeface="Calibri" pitchFamily="34" charset="-122"/>
+                <a:cs typeface="Calibri" pitchFamily="34" charset="-120"/>
+              </a:rPr>
+              <a:t> · minimisation, Karnaugh maps</a:t>
+            </a:r>
+            <a:endParaRPr lang="en-US" sz="1100" dirty="0"/>
+          </a:p>
+        </p:txBody>
+      </p:sp>
+      <p:sp>
+        <p:nvSpPr>
           <p:cNvPr id="25" name="Slide Number Placeholder 0"/>
           <p:cNvSpPr>
             <a:spLocks noGrp="1"/>
@@ -11080,6 +11892,133 @@
       </p:sp>
       <p:sp>
         <p:nvSpPr>
+          <p:cNvPr id="33" name="Shape 31"/>
+          <p:cNvSpPr/>
+          <p:nvPr/>
+        </p:nvSpPr>
+        <p:spPr>
+          <a:xfrm>
+            <a:off x="7893761" y="91440"/>
+            <a:ext cx="3749294" cy="274320"/>
+          </a:xfrm>
+          <a:prstGeom prst="rect">
+            <a:avLst/>
+          </a:prstGeom>
+          <a:solidFill>
+            <a:srgbClr val="E0F2FE"/>
+          </a:solidFill>
+          <a:ln w="12700">
+            <a:solidFill>
+              <a:srgbClr val="0369A1"/>
+            </a:solidFill>
+            <a:prstDash val="solid"/>
+          </a:ln>
+        </p:spPr>
+      </p:sp>
+      <p:sp>
+        <p:nvSpPr>
+          <p:cNvPr id="34" name="Shape 32"/>
+          <p:cNvSpPr/>
+          <p:nvPr/>
+        </p:nvSpPr>
+        <p:spPr>
+          <a:xfrm>
+            <a:off x="7893761" y="91440"/>
+            <a:ext cx="73152" cy="274320"/>
+          </a:xfrm>
+          <a:prstGeom prst="rect">
+            <a:avLst/>
+          </a:prstGeom>
+          <a:solidFill>
+            <a:srgbClr val="0369A1"/>
+          </a:solidFill>
+          <a:ln w="12700">
+            <a:solidFill>
+              <a:srgbClr val="0369A1"/>
+            </a:solidFill>
+            <a:prstDash val="solid"/>
+          </a:ln>
+        </p:spPr>
+      </p:sp>
+      <p:pic>
+        <p:nvPicPr>
+          <p:cNvPr id="35" name="Image 0" descr="preencoded.png">    </p:cNvPr>
+          <p:cNvPicPr>
+            <a:picLocks noChangeAspect="1"/>
+          </p:cNvPicPr>
+          <p:nvPr/>
+        </p:nvPicPr>
+        <p:blipFill>
+          <a:blip r:embed="rId1"/>
+          <a:stretch>
+            <a:fillRect/>
+          </a:stretch>
+        </p:blipFill>
+        <p:spPr>
+          <a:xfrm>
+            <a:off x="8021777" y="128016"/>
+            <a:ext cx="201168" cy="201168"/>
+          </a:xfrm>
+          <a:prstGeom prst="rect">
+            <a:avLst/>
+          </a:prstGeom>
+        </p:spPr>
+      </p:pic>
+      <p:sp>
+        <p:nvSpPr>
+          <p:cNvPr id="36" name="Text 33"/>
+          <p:cNvSpPr txBox="1"/>
+          <p:nvPr/>
+        </p:nvSpPr>
+        <p:spPr>
+          <a:xfrm>
+            <a:off x="8277809" y="91440"/>
+            <a:ext cx="3328670" cy="274320"/>
+          </a:xfrm>
+          <a:prstGeom prst="rect">
+            <a:avLst/>
+          </a:prstGeom>
+          <a:noFill/>
+          <a:ln/>
+        </p:spPr>
+        <p:txBody>
+          <a:bodyPr wrap="square" lIns="0" tIns="0" rIns="0" bIns="0" rtlCol="0" anchor="ctr"/>
+          <a:lstStyle/>
+          <a:p>
+            <a:pPr indent="0" marL="0">
+              <a:buNone/>
+            </a:pPr>
+            <a:r>
+              <a:rPr lang="en-US" sz="1100" b="1" dirty="0">
+                <a:solidFill>
+                  <a:srgbClr val="075985"/>
+                </a:solidFill>
+                <a:latin typeface="Calibri" pitchFamily="34" charset="0"/>
+                <a:ea typeface="Calibri" pitchFamily="34" charset="-122"/>
+                <a:cs typeface="Calibri" pitchFamily="34" charset="-120"/>
+              </a:rPr>
+              <a:t>UNDERSTAND NOW</a:t>
+            </a:r>
+            <a:pPr indent="0" marL="0">
+              <a:buNone/>
+            </a:pPr>
+            <a:r>
+              <a:rPr lang="en-US" sz="1100" dirty="0">
+                <a:solidFill>
+                  <a:srgbClr val="075985"/>
+                </a:solidFill>
+                <a:latin typeface="Calibri" pitchFamily="34" charset="0"/>
+                <a:ea typeface="Calibri" pitchFamily="34" charset="-122"/>
+                <a:cs typeface="Calibri" pitchFamily="34" charset="-120"/>
+              </a:rPr>
+              <a:t> · minimisation, Karnaugh maps</a:t>
+            </a:r>
+            <a:endParaRPr lang="en-US" sz="1100" dirty="0"/>
+          </a:p>
+        </p:txBody>
+      </p:sp>
+      <p:sp>
+        <p:nvSpPr>
           <p:cNvPr id="25" name="Slide Number Placeholder 0"/>
           <p:cNvSpPr>
             <a:spLocks noGrp="1"/>
@@ -12823,6 +13762,133 @@
       </p:sp>
       <p:sp>
         <p:nvSpPr>
+          <p:cNvPr id="44" name="Shape 42"/>
+          <p:cNvSpPr/>
+          <p:nvPr/>
+        </p:nvSpPr>
+        <p:spPr>
+          <a:xfrm>
+            <a:off x="7893761" y="91440"/>
+            <a:ext cx="3749294" cy="274320"/>
+          </a:xfrm>
+          <a:prstGeom prst="rect">
+            <a:avLst/>
+          </a:prstGeom>
+          <a:solidFill>
+            <a:srgbClr val="E0F2FE"/>
+          </a:solidFill>
+          <a:ln w="12700">
+            <a:solidFill>
+              <a:srgbClr val="0369A1"/>
+            </a:solidFill>
+            <a:prstDash val="solid"/>
+          </a:ln>
+        </p:spPr>
+      </p:sp>
+      <p:sp>
+        <p:nvSpPr>
+          <p:cNvPr id="45" name="Shape 43"/>
+          <p:cNvSpPr/>
+          <p:nvPr/>
+        </p:nvSpPr>
+        <p:spPr>
+          <a:xfrm>
+            <a:off x="7893761" y="91440"/>
+            <a:ext cx="73152" cy="274320"/>
+          </a:xfrm>
+          <a:prstGeom prst="rect">
+            <a:avLst/>
+          </a:prstGeom>
+          <a:solidFill>
+            <a:srgbClr val="0369A1"/>
+          </a:solidFill>
+          <a:ln w="12700">
+            <a:solidFill>
+              <a:srgbClr val="0369A1"/>
+            </a:solidFill>
+            <a:prstDash val="solid"/>
+          </a:ln>
+        </p:spPr>
+      </p:sp>
+      <p:pic>
+        <p:nvPicPr>
+          <p:cNvPr id="46" name="Image 0" descr="preencoded.png">    </p:cNvPr>
+          <p:cNvPicPr>
+            <a:picLocks noChangeAspect="1"/>
+          </p:cNvPicPr>
+          <p:nvPr/>
+        </p:nvPicPr>
+        <p:blipFill>
+          <a:blip r:embed="rId1"/>
+          <a:stretch>
+            <a:fillRect/>
+          </a:stretch>
+        </p:blipFill>
+        <p:spPr>
+          <a:xfrm>
+            <a:off x="8021777" y="128016"/>
+            <a:ext cx="201168" cy="201168"/>
+          </a:xfrm>
+          <a:prstGeom prst="rect">
+            <a:avLst/>
+          </a:prstGeom>
+        </p:spPr>
+      </p:pic>
+      <p:sp>
+        <p:nvSpPr>
+          <p:cNvPr id="47" name="Text 44"/>
+          <p:cNvSpPr txBox="1"/>
+          <p:nvPr/>
+        </p:nvSpPr>
+        <p:spPr>
+          <a:xfrm>
+            <a:off x="8277809" y="91440"/>
+            <a:ext cx="3328670" cy="274320"/>
+          </a:xfrm>
+          <a:prstGeom prst="rect">
+            <a:avLst/>
+          </a:prstGeom>
+          <a:noFill/>
+          <a:ln/>
+        </p:spPr>
+        <p:txBody>
+          <a:bodyPr wrap="square" lIns="0" tIns="0" rIns="0" bIns="0" rtlCol="0" anchor="ctr"/>
+          <a:lstStyle/>
+          <a:p>
+            <a:pPr indent="0" marL="0">
+              <a:buNone/>
+            </a:pPr>
+            <a:r>
+              <a:rPr lang="en-US" sz="1100" b="1" dirty="0">
+                <a:solidFill>
+                  <a:srgbClr val="075985"/>
+                </a:solidFill>
+                <a:latin typeface="Calibri" pitchFamily="34" charset="0"/>
+                <a:ea typeface="Calibri" pitchFamily="34" charset="-122"/>
+                <a:cs typeface="Calibri" pitchFamily="34" charset="-120"/>
+              </a:rPr>
+              <a:t>UNDERSTAND NOW</a:t>
+            </a:r>
+            <a:pPr indent="0" marL="0">
+              <a:buNone/>
+            </a:pPr>
+            <a:r>
+              <a:rPr lang="en-US" sz="1100" dirty="0">
+                <a:solidFill>
+                  <a:srgbClr val="075985"/>
+                </a:solidFill>
+                <a:latin typeface="Calibri" pitchFamily="34" charset="0"/>
+                <a:ea typeface="Calibri" pitchFamily="34" charset="-122"/>
+                <a:cs typeface="Calibri" pitchFamily="34" charset="-120"/>
+              </a:rPr>
+              <a:t> · minimisation, Karnaugh maps</a:t>
+            </a:r>
+            <a:endParaRPr lang="en-US" sz="1100" dirty="0"/>
+          </a:p>
+        </p:txBody>
+      </p:sp>
+      <p:sp>
+        <p:nvSpPr>
           <p:cNvPr id="25" name="Slide Number Placeholder 0"/>
           <p:cNvSpPr>
             <a:spLocks noGrp="1"/>
@@ -13397,6 +14463,133 @@
       </p:sp>
       <p:sp>
         <p:nvSpPr>
+          <p:cNvPr id="16" name="Shape 14"/>
+          <p:cNvSpPr/>
+          <p:nvPr/>
+        </p:nvSpPr>
+        <p:spPr>
+          <a:xfrm>
+            <a:off x="7893761" y="91440"/>
+            <a:ext cx="3749294" cy="274320"/>
+          </a:xfrm>
+          <a:prstGeom prst="rect">
+            <a:avLst/>
+          </a:prstGeom>
+          <a:solidFill>
+            <a:srgbClr val="E0F2FE"/>
+          </a:solidFill>
+          <a:ln w="12700">
+            <a:solidFill>
+              <a:srgbClr val="0369A1"/>
+            </a:solidFill>
+            <a:prstDash val="solid"/>
+          </a:ln>
+        </p:spPr>
+      </p:sp>
+      <p:sp>
+        <p:nvSpPr>
+          <p:cNvPr id="17" name="Shape 15"/>
+          <p:cNvSpPr/>
+          <p:nvPr/>
+        </p:nvSpPr>
+        <p:spPr>
+          <a:xfrm>
+            <a:off x="7893761" y="91440"/>
+            <a:ext cx="73152" cy="274320"/>
+          </a:xfrm>
+          <a:prstGeom prst="rect">
+            <a:avLst/>
+          </a:prstGeom>
+          <a:solidFill>
+            <a:srgbClr val="0369A1"/>
+          </a:solidFill>
+          <a:ln w="12700">
+            <a:solidFill>
+              <a:srgbClr val="0369A1"/>
+            </a:solidFill>
+            <a:prstDash val="solid"/>
+          </a:ln>
+        </p:spPr>
+      </p:sp>
+      <p:pic>
+        <p:nvPicPr>
+          <p:cNvPr id="18" name="Image 0" descr="preencoded.png">    </p:cNvPr>
+          <p:cNvPicPr>
+            <a:picLocks noChangeAspect="1"/>
+          </p:cNvPicPr>
+          <p:nvPr/>
+        </p:nvPicPr>
+        <p:blipFill>
+          <a:blip r:embed="rId1"/>
+          <a:stretch>
+            <a:fillRect/>
+          </a:stretch>
+        </p:blipFill>
+        <p:spPr>
+          <a:xfrm>
+            <a:off x="8021777" y="128016"/>
+            <a:ext cx="201168" cy="201168"/>
+          </a:xfrm>
+          <a:prstGeom prst="rect">
+            <a:avLst/>
+          </a:prstGeom>
+        </p:spPr>
+      </p:pic>
+      <p:sp>
+        <p:nvSpPr>
+          <p:cNvPr id="19" name="Text 16"/>
+          <p:cNvSpPr txBox="1"/>
+          <p:nvPr/>
+        </p:nvSpPr>
+        <p:spPr>
+          <a:xfrm>
+            <a:off x="8277809" y="91440"/>
+            <a:ext cx="3328670" cy="274320"/>
+          </a:xfrm>
+          <a:prstGeom prst="rect">
+            <a:avLst/>
+          </a:prstGeom>
+          <a:noFill/>
+          <a:ln/>
+        </p:spPr>
+        <p:txBody>
+          <a:bodyPr wrap="square" lIns="0" tIns="0" rIns="0" bIns="0" rtlCol="0" anchor="ctr"/>
+          <a:lstStyle/>
+          <a:p>
+            <a:pPr indent="0" marL="0">
+              <a:buNone/>
+            </a:pPr>
+            <a:r>
+              <a:rPr lang="en-US" sz="1100" b="1" dirty="0">
+                <a:solidFill>
+                  <a:srgbClr val="075985"/>
+                </a:solidFill>
+                <a:latin typeface="Calibri" pitchFamily="34" charset="0"/>
+                <a:ea typeface="Calibri" pitchFamily="34" charset="-122"/>
+                <a:cs typeface="Calibri" pitchFamily="34" charset="-120"/>
+              </a:rPr>
+              <a:t>UNDERSTAND NOW</a:t>
+            </a:r>
+            <a:pPr indent="0" marL="0">
+              <a:buNone/>
+            </a:pPr>
+            <a:r>
+              <a:rPr lang="en-US" sz="1100" dirty="0">
+                <a:solidFill>
+                  <a:srgbClr val="075985"/>
+                </a:solidFill>
+                <a:latin typeface="Calibri" pitchFamily="34" charset="0"/>
+                <a:ea typeface="Calibri" pitchFamily="34" charset="-122"/>
+                <a:cs typeface="Calibri" pitchFamily="34" charset="-120"/>
+              </a:rPr>
+              <a:t> · minimisation, Karnaugh maps</a:t>
+            </a:r>
+            <a:endParaRPr lang="en-US" sz="1100" dirty="0"/>
+          </a:p>
+        </p:txBody>
+      </p:sp>
+      <p:sp>
+        <p:nvSpPr>
           <p:cNvPr id="25" name="Slide Number Placeholder 0"/>
           <p:cNvSpPr>
             <a:spLocks noGrp="1"/>
@@ -15036,6 +16229,133 @@
               <a:t>sub uses the same adder: the second operand is complemented and the first carry in is 1 (Lecture 05)</a:t>
             </a:r>
             <a:endParaRPr lang="en-US" sz="1900" dirty="0"/>
+          </a:p>
+        </p:txBody>
+      </p:sp>
+      <p:sp>
+        <p:nvSpPr>
+          <p:cNvPr id="47" name="Shape 45"/>
+          <p:cNvSpPr/>
+          <p:nvPr/>
+        </p:nvSpPr>
+        <p:spPr>
+          <a:xfrm>
+            <a:off x="9075623" y="91440"/>
+            <a:ext cx="2567432" cy="274320"/>
+          </a:xfrm>
+          <a:prstGeom prst="rect">
+            <a:avLst/>
+          </a:prstGeom>
+          <a:solidFill>
+            <a:srgbClr val="E0F2FE"/>
+          </a:solidFill>
+          <a:ln w="12700">
+            <a:solidFill>
+              <a:srgbClr val="0369A1"/>
+            </a:solidFill>
+            <a:prstDash val="solid"/>
+          </a:ln>
+        </p:spPr>
+      </p:sp>
+      <p:sp>
+        <p:nvSpPr>
+          <p:cNvPr id="48" name="Shape 46"/>
+          <p:cNvSpPr/>
+          <p:nvPr/>
+        </p:nvSpPr>
+        <p:spPr>
+          <a:xfrm>
+            <a:off x="9075623" y="91440"/>
+            <a:ext cx="73152" cy="274320"/>
+          </a:xfrm>
+          <a:prstGeom prst="rect">
+            <a:avLst/>
+          </a:prstGeom>
+          <a:solidFill>
+            <a:srgbClr val="0369A1"/>
+          </a:solidFill>
+          <a:ln w="12700">
+            <a:solidFill>
+              <a:srgbClr val="0369A1"/>
+            </a:solidFill>
+            <a:prstDash val="solid"/>
+          </a:ln>
+        </p:spPr>
+      </p:sp>
+      <p:pic>
+        <p:nvPicPr>
+          <p:cNvPr id="49" name="Image 0" descr="preencoded.png">    </p:cNvPr>
+          <p:cNvPicPr>
+            <a:picLocks noChangeAspect="1"/>
+          </p:cNvPicPr>
+          <p:nvPr/>
+        </p:nvPicPr>
+        <p:blipFill>
+          <a:blip r:embed="rId1"/>
+          <a:stretch>
+            <a:fillRect/>
+          </a:stretch>
+        </p:blipFill>
+        <p:spPr>
+          <a:xfrm>
+            <a:off x="9203639" y="128016"/>
+            <a:ext cx="201168" cy="201168"/>
+          </a:xfrm>
+          <a:prstGeom prst="rect">
+            <a:avLst/>
+          </a:prstGeom>
+        </p:spPr>
+      </p:pic>
+      <p:sp>
+        <p:nvSpPr>
+          <p:cNvPr id="50" name="Text 47"/>
+          <p:cNvSpPr txBox="1"/>
+          <p:nvPr/>
+        </p:nvSpPr>
+        <p:spPr>
+          <a:xfrm>
+            <a:off x="9459671" y="91440"/>
+            <a:ext cx="2146808" cy="274320"/>
+          </a:xfrm>
+          <a:prstGeom prst="rect">
+            <a:avLst/>
+          </a:prstGeom>
+          <a:noFill/>
+          <a:ln/>
+        </p:spPr>
+        <p:txBody>
+          <a:bodyPr wrap="square" lIns="0" tIns="0" rIns="0" bIns="0" rtlCol="0" anchor="ctr"/>
+          <a:lstStyle/>
+          <a:p>
+            <a:pPr indent="0" marL="0">
+              <a:buNone/>
+            </a:pPr>
+            <a:r>
+              <a:rPr lang="en-US" sz="1100" b="1" dirty="0">
+                <a:solidFill>
+                  <a:srgbClr val="075985"/>
+                </a:solidFill>
+                <a:latin typeface="Calibri" pitchFamily="34" charset="0"/>
+                <a:ea typeface="Calibri" pitchFamily="34" charset="-122"/>
+                <a:cs typeface="Calibri" pitchFamily="34" charset="-120"/>
+              </a:rPr>
+              <a:t>UNDERSTAND NOW</a:t>
+            </a:r>
+            <a:pPr indent="0" marL="0">
+              <a:buNone/>
+            </a:pPr>
+            <a:r>
+              <a:rPr lang="en-US" sz="1100" dirty="0">
+                <a:solidFill>
+                  <a:srgbClr val="075985"/>
+                </a:solidFill>
+                <a:latin typeface="Calibri" pitchFamily="34" charset="0"/>
+                <a:ea typeface="Calibri" pitchFamily="34" charset="-122"/>
+                <a:cs typeface="Calibri" pitchFamily="34" charset="-120"/>
+              </a:rPr>
+              <a:t> · the adder</a:t>
+            </a:r>
+            <a:endParaRPr lang="en-US" sz="1100" dirty="0"/>
           </a:p>
         </p:txBody>
       </p:sp>
@@ -21062,6 +22382,133 @@
       </p:sp>
       <p:sp>
         <p:nvSpPr>
+          <p:cNvPr id="11" name="Shape 9"/>
+          <p:cNvSpPr/>
+          <p:nvPr/>
+        </p:nvSpPr>
+        <p:spPr>
+          <a:xfrm>
+            <a:off x="8550351" y="91440"/>
+            <a:ext cx="3092704" cy="274320"/>
+          </a:xfrm>
+          <a:prstGeom prst="rect">
+            <a:avLst/>
+          </a:prstGeom>
+          <a:solidFill>
+            <a:srgbClr val="E0F2FE"/>
+          </a:solidFill>
+          <a:ln w="12700">
+            <a:solidFill>
+              <a:srgbClr val="0369A1"/>
+            </a:solidFill>
+            <a:prstDash val="solid"/>
+          </a:ln>
+        </p:spPr>
+      </p:sp>
+      <p:sp>
+        <p:nvSpPr>
+          <p:cNvPr id="12" name="Shape 10"/>
+          <p:cNvSpPr/>
+          <p:nvPr/>
+        </p:nvSpPr>
+        <p:spPr>
+          <a:xfrm>
+            <a:off x="8550351" y="91440"/>
+            <a:ext cx="73152" cy="274320"/>
+          </a:xfrm>
+          <a:prstGeom prst="rect">
+            <a:avLst/>
+          </a:prstGeom>
+          <a:solidFill>
+            <a:srgbClr val="0369A1"/>
+          </a:solidFill>
+          <a:ln w="12700">
+            <a:solidFill>
+              <a:srgbClr val="0369A1"/>
+            </a:solidFill>
+            <a:prstDash val="solid"/>
+          </a:ln>
+        </p:spPr>
+      </p:sp>
+      <p:pic>
+        <p:nvPicPr>
+          <p:cNvPr id="13" name="Image 0" descr="preencoded.png">    </p:cNvPr>
+          <p:cNvPicPr>
+            <a:picLocks noChangeAspect="1"/>
+          </p:cNvPicPr>
+          <p:nvPr/>
+        </p:nvPicPr>
+        <p:blipFill>
+          <a:blip r:embed="rId1"/>
+          <a:stretch>
+            <a:fillRect/>
+          </a:stretch>
+        </p:blipFill>
+        <p:spPr>
+          <a:xfrm>
+            <a:off x="8678367" y="128016"/>
+            <a:ext cx="201168" cy="201168"/>
+          </a:xfrm>
+          <a:prstGeom prst="rect">
+            <a:avLst/>
+          </a:prstGeom>
+        </p:spPr>
+      </p:pic>
+      <p:sp>
+        <p:nvSpPr>
+          <p:cNvPr id="14" name="Text 11"/>
+          <p:cNvSpPr txBox="1"/>
+          <p:nvPr/>
+        </p:nvSpPr>
+        <p:spPr>
+          <a:xfrm>
+            <a:off x="8934399" y="91440"/>
+            <a:ext cx="2672080" cy="274320"/>
+          </a:xfrm>
+          <a:prstGeom prst="rect">
+            <a:avLst/>
+          </a:prstGeom>
+          <a:noFill/>
+          <a:ln/>
+        </p:spPr>
+        <p:txBody>
+          <a:bodyPr wrap="square" lIns="0" tIns="0" rIns="0" bIns="0" rtlCol="0" anchor="ctr"/>
+          <a:lstStyle/>
+          <a:p>
+            <a:pPr indent="0" marL="0">
+              <a:buNone/>
+            </a:pPr>
+            <a:r>
+              <a:rPr lang="en-US" sz="1100" b="1" dirty="0">
+                <a:solidFill>
+                  <a:srgbClr val="075985"/>
+                </a:solidFill>
+                <a:latin typeface="Calibri" pitchFamily="34" charset="0"/>
+                <a:ea typeface="Calibri" pitchFamily="34" charset="-122"/>
+                <a:cs typeface="Calibri" pitchFamily="34" charset="-120"/>
+              </a:rPr>
+              <a:t>UNDERSTAND NOW</a:t>
+            </a:r>
+            <a:pPr indent="0" marL="0">
+              <a:buNone/>
+            </a:pPr>
+            <a:r>
+              <a:rPr lang="en-US" sz="1100" dirty="0">
+                <a:solidFill>
+                  <a:srgbClr val="075985"/>
+                </a:solidFill>
+                <a:latin typeface="Calibri" pitchFamily="34" charset="0"/>
+                <a:ea typeface="Calibri" pitchFamily="34" charset="-122"/>
+                <a:cs typeface="Calibri" pitchFamily="34" charset="-120"/>
+              </a:rPr>
+              <a:t> · Boolean functions</a:t>
+            </a:r>
+            <a:endParaRPr lang="en-US" sz="1100" dirty="0"/>
+          </a:p>
+        </p:txBody>
+      </p:sp>
+      <p:sp>
+        <p:nvSpPr>
           <p:cNvPr id="25" name="Slide Number Placeholder 0"/>
           <p:cNvSpPr>
             <a:spLocks noGrp="1"/>
@@ -21564,6 +23011,133 @@
               <a:t>the number of distinct Boolean functions of n variables</a:t>
             </a:r>
             <a:endParaRPr lang="en-US" sz="1900" dirty="0"/>
+          </a:p>
+        </p:txBody>
+      </p:sp>
+      <p:sp>
+        <p:nvSpPr>
+          <p:cNvPr id="14" name="Shape 12"/>
+          <p:cNvSpPr/>
+          <p:nvPr/>
+        </p:nvSpPr>
+        <p:spPr>
+          <a:xfrm>
+            <a:off x="8550351" y="91440"/>
+            <a:ext cx="3092704" cy="274320"/>
+          </a:xfrm>
+          <a:prstGeom prst="rect">
+            <a:avLst/>
+          </a:prstGeom>
+          <a:solidFill>
+            <a:srgbClr val="E0F2FE"/>
+          </a:solidFill>
+          <a:ln w="12700">
+            <a:solidFill>
+              <a:srgbClr val="0369A1"/>
+            </a:solidFill>
+            <a:prstDash val="solid"/>
+          </a:ln>
+        </p:spPr>
+      </p:sp>
+      <p:sp>
+        <p:nvSpPr>
+          <p:cNvPr id="15" name="Shape 13"/>
+          <p:cNvSpPr/>
+          <p:nvPr/>
+        </p:nvSpPr>
+        <p:spPr>
+          <a:xfrm>
+            <a:off x="8550351" y="91440"/>
+            <a:ext cx="73152" cy="274320"/>
+          </a:xfrm>
+          <a:prstGeom prst="rect">
+            <a:avLst/>
+          </a:prstGeom>
+          <a:solidFill>
+            <a:srgbClr val="0369A1"/>
+          </a:solidFill>
+          <a:ln w="12700">
+            <a:solidFill>
+              <a:srgbClr val="0369A1"/>
+            </a:solidFill>
+            <a:prstDash val="solid"/>
+          </a:ln>
+        </p:spPr>
+      </p:sp>
+      <p:pic>
+        <p:nvPicPr>
+          <p:cNvPr id="16" name="Image 0" descr="preencoded.png">    </p:cNvPr>
+          <p:cNvPicPr>
+            <a:picLocks noChangeAspect="1"/>
+          </p:cNvPicPr>
+          <p:nvPr/>
+        </p:nvPicPr>
+        <p:blipFill>
+          <a:blip r:embed="rId1"/>
+          <a:stretch>
+            <a:fillRect/>
+          </a:stretch>
+        </p:blipFill>
+        <p:spPr>
+          <a:xfrm>
+            <a:off x="8678367" y="128016"/>
+            <a:ext cx="201168" cy="201168"/>
+          </a:xfrm>
+          <a:prstGeom prst="rect">
+            <a:avLst/>
+          </a:prstGeom>
+        </p:spPr>
+      </p:pic>
+      <p:sp>
+        <p:nvSpPr>
+          <p:cNvPr id="17" name="Text 14"/>
+          <p:cNvSpPr txBox="1"/>
+          <p:nvPr/>
+        </p:nvSpPr>
+        <p:spPr>
+          <a:xfrm>
+            <a:off x="8934399" y="91440"/>
+            <a:ext cx="2672080" cy="274320"/>
+          </a:xfrm>
+          <a:prstGeom prst="rect">
+            <a:avLst/>
+          </a:prstGeom>
+          <a:noFill/>
+          <a:ln/>
+        </p:spPr>
+        <p:txBody>
+          <a:bodyPr wrap="square" lIns="0" tIns="0" rIns="0" bIns="0" rtlCol="0" anchor="ctr"/>
+          <a:lstStyle/>
+          <a:p>
+            <a:pPr indent="0" marL="0">
+              <a:buNone/>
+            </a:pPr>
+            <a:r>
+              <a:rPr lang="en-US" sz="1100" b="1" dirty="0">
+                <a:solidFill>
+                  <a:srgbClr val="075985"/>
+                </a:solidFill>
+                <a:latin typeface="Calibri" pitchFamily="34" charset="0"/>
+                <a:ea typeface="Calibri" pitchFamily="34" charset="-122"/>
+                <a:cs typeface="Calibri" pitchFamily="34" charset="-120"/>
+              </a:rPr>
+              <a:t>UNDERSTAND NOW</a:t>
+            </a:r>
+            <a:pPr indent="0" marL="0">
+              <a:buNone/>
+            </a:pPr>
+            <a:r>
+              <a:rPr lang="en-US" sz="1100" dirty="0">
+                <a:solidFill>
+                  <a:srgbClr val="075985"/>
+                </a:solidFill>
+                <a:latin typeface="Calibri" pitchFamily="34" charset="0"/>
+                <a:ea typeface="Calibri" pitchFamily="34" charset="-122"/>
+                <a:cs typeface="Calibri" pitchFamily="34" charset="-120"/>
+              </a:rPr>
+              <a:t> · Boolean functions</a:t>
+            </a:r>
+            <a:endParaRPr lang="en-US" sz="1100" dirty="0"/>
           </a:p>
         </p:txBody>
       </p:sp>
@@ -29209,6 +30783,133 @@
       </p:sp>
       <p:sp>
         <p:nvSpPr>
+          <p:cNvPr id="7" name="Shape 3"/>
+          <p:cNvSpPr/>
+          <p:nvPr/>
+        </p:nvSpPr>
+        <p:spPr>
+          <a:xfrm>
+            <a:off x="8550351" y="91440"/>
+            <a:ext cx="3092704" cy="274320"/>
+          </a:xfrm>
+          <a:prstGeom prst="rect">
+            <a:avLst/>
+          </a:prstGeom>
+          <a:solidFill>
+            <a:srgbClr val="E0F2FE"/>
+          </a:solidFill>
+          <a:ln w="12700">
+            <a:solidFill>
+              <a:srgbClr val="0369A1"/>
+            </a:solidFill>
+            <a:prstDash val="solid"/>
+          </a:ln>
+        </p:spPr>
+      </p:sp>
+      <p:sp>
+        <p:nvSpPr>
+          <p:cNvPr id="8" name="Shape 4"/>
+          <p:cNvSpPr/>
+          <p:nvPr/>
+        </p:nvSpPr>
+        <p:spPr>
+          <a:xfrm>
+            <a:off x="8550351" y="91440"/>
+            <a:ext cx="73152" cy="274320"/>
+          </a:xfrm>
+          <a:prstGeom prst="rect">
+            <a:avLst/>
+          </a:prstGeom>
+          <a:solidFill>
+            <a:srgbClr val="0369A1"/>
+          </a:solidFill>
+          <a:ln w="12700">
+            <a:solidFill>
+              <a:srgbClr val="0369A1"/>
+            </a:solidFill>
+            <a:prstDash val="solid"/>
+          </a:ln>
+        </p:spPr>
+      </p:sp>
+      <p:pic>
+        <p:nvPicPr>
+          <p:cNvPr id="9" name="Image 0" descr="preencoded.png">    </p:cNvPr>
+          <p:cNvPicPr>
+            <a:picLocks noChangeAspect="1"/>
+          </p:cNvPicPr>
+          <p:nvPr/>
+        </p:nvPicPr>
+        <p:blipFill>
+          <a:blip r:embed="rId1"/>
+          <a:stretch>
+            <a:fillRect/>
+          </a:stretch>
+        </p:blipFill>
+        <p:spPr>
+          <a:xfrm>
+            <a:off x="8678367" y="128016"/>
+            <a:ext cx="201168" cy="201168"/>
+          </a:xfrm>
+          <a:prstGeom prst="rect">
+            <a:avLst/>
+          </a:prstGeom>
+        </p:spPr>
+      </p:pic>
+      <p:sp>
+        <p:nvSpPr>
+          <p:cNvPr id="10" name="Text 5"/>
+          <p:cNvSpPr txBox="1"/>
+          <p:nvPr/>
+        </p:nvSpPr>
+        <p:spPr>
+          <a:xfrm>
+            <a:off x="8934399" y="91440"/>
+            <a:ext cx="2672080" cy="274320"/>
+          </a:xfrm>
+          <a:prstGeom prst="rect">
+            <a:avLst/>
+          </a:prstGeom>
+          <a:noFill/>
+          <a:ln/>
+        </p:spPr>
+        <p:txBody>
+          <a:bodyPr wrap="square" lIns="0" tIns="0" rIns="0" bIns="0" rtlCol="0" anchor="ctr"/>
+          <a:lstStyle/>
+          <a:p>
+            <a:pPr indent="0" marL="0">
+              <a:buNone/>
+            </a:pPr>
+            <a:r>
+              <a:rPr lang="en-US" sz="1100" b="1" dirty="0">
+                <a:solidFill>
+                  <a:srgbClr val="075985"/>
+                </a:solidFill>
+                <a:latin typeface="Calibri" pitchFamily="34" charset="0"/>
+                <a:ea typeface="Calibri" pitchFamily="34" charset="-122"/>
+                <a:cs typeface="Calibri" pitchFamily="34" charset="-120"/>
+              </a:rPr>
+              <a:t>UNDERSTAND NOW</a:t>
+            </a:r>
+            <a:pPr indent="0" marL="0">
+              <a:buNone/>
+            </a:pPr>
+            <a:r>
+              <a:rPr lang="en-US" sz="1100" dirty="0">
+                <a:solidFill>
+                  <a:srgbClr val="075985"/>
+                </a:solidFill>
+                <a:latin typeface="Calibri" pitchFamily="34" charset="0"/>
+                <a:ea typeface="Calibri" pitchFamily="34" charset="-122"/>
+                <a:cs typeface="Calibri" pitchFamily="34" charset="-120"/>
+              </a:rPr>
+              <a:t> · Boolean functions</a:t>
+            </a:r>
+            <a:endParaRPr lang="en-US" sz="1100" dirty="0"/>
+          </a:p>
+        </p:txBody>
+      </p:sp>
+      <p:sp>
+        <p:nvSpPr>
           <p:cNvPr id="25" name="Slide Number Placeholder 0"/>
           <p:cNvSpPr>
             <a:spLocks noGrp="1"/>
@@ -29758,6 +31459,133 @@
               <a:t>a single type of gate is enough to build any digital circuit, a whole processor included</a:t>
             </a:r>
             <a:endParaRPr lang="en-US" sz="1900" dirty="0"/>
+          </a:p>
+        </p:txBody>
+      </p:sp>
+      <p:sp>
+        <p:nvSpPr>
+          <p:cNvPr id="16" name="Shape 14"/>
+          <p:cNvSpPr/>
+          <p:nvPr/>
+        </p:nvSpPr>
+        <p:spPr>
+          <a:xfrm>
+            <a:off x="8550351" y="91440"/>
+            <a:ext cx="3092704" cy="274320"/>
+          </a:xfrm>
+          <a:prstGeom prst="rect">
+            <a:avLst/>
+          </a:prstGeom>
+          <a:solidFill>
+            <a:srgbClr val="E0F2FE"/>
+          </a:solidFill>
+          <a:ln w="12700">
+            <a:solidFill>
+              <a:srgbClr val="0369A1"/>
+            </a:solidFill>
+            <a:prstDash val="solid"/>
+          </a:ln>
+        </p:spPr>
+      </p:sp>
+      <p:sp>
+        <p:nvSpPr>
+          <p:cNvPr id="17" name="Shape 15"/>
+          <p:cNvSpPr/>
+          <p:nvPr/>
+        </p:nvSpPr>
+        <p:spPr>
+          <a:xfrm>
+            <a:off x="8550351" y="91440"/>
+            <a:ext cx="73152" cy="274320"/>
+          </a:xfrm>
+          <a:prstGeom prst="rect">
+            <a:avLst/>
+          </a:prstGeom>
+          <a:solidFill>
+            <a:srgbClr val="0369A1"/>
+          </a:solidFill>
+          <a:ln w="12700">
+            <a:solidFill>
+              <a:srgbClr val="0369A1"/>
+            </a:solidFill>
+            <a:prstDash val="solid"/>
+          </a:ln>
+        </p:spPr>
+      </p:sp>
+      <p:pic>
+        <p:nvPicPr>
+          <p:cNvPr id="18" name="Image 0" descr="preencoded.png">    </p:cNvPr>
+          <p:cNvPicPr>
+            <a:picLocks noChangeAspect="1"/>
+          </p:cNvPicPr>
+          <p:nvPr/>
+        </p:nvPicPr>
+        <p:blipFill>
+          <a:blip r:embed="rId1"/>
+          <a:stretch>
+            <a:fillRect/>
+          </a:stretch>
+        </p:blipFill>
+        <p:spPr>
+          <a:xfrm>
+            <a:off x="8678367" y="128016"/>
+            <a:ext cx="201168" cy="201168"/>
+          </a:xfrm>
+          <a:prstGeom prst="rect">
+            <a:avLst/>
+          </a:prstGeom>
+        </p:spPr>
+      </p:pic>
+      <p:sp>
+        <p:nvSpPr>
+          <p:cNvPr id="19" name="Text 16"/>
+          <p:cNvSpPr txBox="1"/>
+          <p:nvPr/>
+        </p:nvSpPr>
+        <p:spPr>
+          <a:xfrm>
+            <a:off x="8934399" y="91440"/>
+            <a:ext cx="2672080" cy="274320"/>
+          </a:xfrm>
+          <a:prstGeom prst="rect">
+            <a:avLst/>
+          </a:prstGeom>
+          <a:noFill/>
+          <a:ln/>
+        </p:spPr>
+        <p:txBody>
+          <a:bodyPr wrap="square" lIns="0" tIns="0" rIns="0" bIns="0" rtlCol="0" anchor="ctr"/>
+          <a:lstStyle/>
+          <a:p>
+            <a:pPr indent="0" marL="0">
+              <a:buNone/>
+            </a:pPr>
+            <a:r>
+              <a:rPr lang="en-US" sz="1100" b="1" dirty="0">
+                <a:solidFill>
+                  <a:srgbClr val="075985"/>
+                </a:solidFill>
+                <a:latin typeface="Calibri" pitchFamily="34" charset="0"/>
+                <a:ea typeface="Calibri" pitchFamily="34" charset="-122"/>
+                <a:cs typeface="Calibri" pitchFamily="34" charset="-120"/>
+              </a:rPr>
+              <a:t>UNDERSTAND NOW</a:t>
+            </a:r>
+            <a:pPr indent="0" marL="0">
+              <a:buNone/>
+            </a:pPr>
+            <a:r>
+              <a:rPr lang="en-US" sz="1100" dirty="0">
+                <a:solidFill>
+                  <a:srgbClr val="075985"/>
+                </a:solidFill>
+                <a:latin typeface="Calibri" pitchFamily="34" charset="0"/>
+                <a:ea typeface="Calibri" pitchFamily="34" charset="-122"/>
+                <a:cs typeface="Calibri" pitchFamily="34" charset="-120"/>
+              </a:rPr>
+              <a:t> · Boolean functions</a:t>
+            </a:r>
+            <a:endParaRPr lang="en-US" sz="1100" dirty="0"/>
           </a:p>
         </p:txBody>
       </p:sp>
@@ -31544,9 +33372,59 @@
           </a:ln>
         </p:spPr>
       </p:sp>
+      <p:sp>
+        <p:nvSpPr>
+          <p:cNvPr id="12" name="Shape 9"/>
+          <p:cNvSpPr/>
+          <p:nvPr/>
+        </p:nvSpPr>
+        <p:spPr>
+          <a:xfrm>
+            <a:off x="9075623" y="91440"/>
+            <a:ext cx="2567432" cy="274320"/>
+          </a:xfrm>
+          <a:prstGeom prst="rect">
+            <a:avLst/>
+          </a:prstGeom>
+          <a:solidFill>
+            <a:srgbClr val="E0F2FE"/>
+          </a:solidFill>
+          <a:ln w="12700">
+            <a:solidFill>
+              <a:srgbClr val="0369A1"/>
+            </a:solidFill>
+            <a:prstDash val="solid"/>
+          </a:ln>
+        </p:spPr>
+      </p:sp>
+      <p:sp>
+        <p:nvSpPr>
+          <p:cNvPr id="13" name="Shape 10"/>
+          <p:cNvSpPr/>
+          <p:nvPr/>
+        </p:nvSpPr>
+        <p:spPr>
+          <a:xfrm>
+            <a:off x="9075623" y="91440"/>
+            <a:ext cx="73152" cy="274320"/>
+          </a:xfrm>
+          <a:prstGeom prst="rect">
+            <a:avLst/>
+          </a:prstGeom>
+          <a:solidFill>
+            <a:srgbClr val="0369A1"/>
+          </a:solidFill>
+          <a:ln w="12700">
+            <a:solidFill>
+              <a:srgbClr val="0369A1"/>
+            </a:solidFill>
+            <a:prstDash val="solid"/>
+          </a:ln>
+        </p:spPr>
+      </p:sp>
       <p:pic>
         <p:nvPicPr>
-          <p:cNvPr id="13" name="Image 0" descr="preencoded.png">    </p:cNvPr>
+          <p:cNvPr id="14" name="Image 0" descr="preencoded.png">    </p:cNvPr>
           <p:cNvPicPr>
             <a:picLocks noChangeAspect="1"/>
           </p:cNvPicPr>
@@ -31554,6 +33432,83 @@
         </p:nvPicPr>
         <p:blipFill>
           <a:blip r:embed="rId1"/>
+          <a:stretch>
+            <a:fillRect/>
+          </a:stretch>
+        </p:blipFill>
+        <p:spPr>
+          <a:xfrm>
+            <a:off x="9203639" y="128016"/>
+            <a:ext cx="201168" cy="201168"/>
+          </a:xfrm>
+          <a:prstGeom prst="rect">
+            <a:avLst/>
+          </a:prstGeom>
+        </p:spPr>
+      </p:pic>
+      <p:sp>
+        <p:nvSpPr>
+          <p:cNvPr id="15" name="Text 11"/>
+          <p:cNvSpPr txBox="1"/>
+          <p:nvPr/>
+        </p:nvSpPr>
+        <p:spPr>
+          <a:xfrm>
+            <a:off x="9459671" y="91440"/>
+            <a:ext cx="2146808" cy="274320"/>
+          </a:xfrm>
+          <a:prstGeom prst="rect">
+            <a:avLst/>
+          </a:prstGeom>
+          <a:noFill/>
+          <a:ln/>
+        </p:spPr>
+        <p:txBody>
+          <a:bodyPr wrap="square" lIns="0" tIns="0" rIns="0" bIns="0" rtlCol="0" anchor="ctr"/>
+          <a:lstStyle/>
+          <a:p>
+            <a:pPr indent="0" marL="0">
+              <a:buNone/>
+            </a:pPr>
+            <a:r>
+              <a:rPr lang="en-US" sz="1100" b="1" dirty="0">
+                <a:solidFill>
+                  <a:srgbClr val="075985"/>
+                </a:solidFill>
+                <a:latin typeface="Calibri" pitchFamily="34" charset="0"/>
+                <a:ea typeface="Calibri" pitchFamily="34" charset="-122"/>
+                <a:cs typeface="Calibri" pitchFamily="34" charset="-120"/>
+              </a:rPr>
+              <a:t>UNDERSTAND NOW</a:t>
+            </a:r>
+            <a:pPr indent="0" marL="0">
+              <a:buNone/>
+            </a:pPr>
+            <a:r>
+              <a:rPr lang="en-US" sz="1100" dirty="0">
+                <a:solidFill>
+                  <a:srgbClr val="075985"/>
+                </a:solidFill>
+                <a:latin typeface="Calibri" pitchFamily="34" charset="0"/>
+                <a:ea typeface="Calibri" pitchFamily="34" charset="-122"/>
+                <a:cs typeface="Calibri" pitchFamily="34" charset="-120"/>
+              </a:rPr>
+              <a:t> · the adder</a:t>
+            </a:r>
+            <a:endParaRPr lang="en-US" sz="1100" dirty="0"/>
+          </a:p>
+        </p:txBody>
+      </p:sp>
+      <p:pic>
+        <p:nvPicPr>
+          <p:cNvPr id="17" name="Image 1" descr="preencoded.png">    </p:cNvPr>
+          <p:cNvPicPr>
+            <a:picLocks noChangeAspect="1"/>
+          </p:cNvPicPr>
+          <p:nvPr/>
+        </p:nvPicPr>
+        <p:blipFill>
+          <a:blip r:embed="rId2"/>
           <a:stretch>
             <a:fillRect/>
           </a:stretch>
@@ -34937,9 +36892,59 @@
           </a:ln>
         </p:spPr>
       </p:sp>
+      <p:sp>
+        <p:nvSpPr>
+          <p:cNvPr id="8" name="Shape 5"/>
+          <p:cNvSpPr/>
+          <p:nvPr/>
+        </p:nvSpPr>
+        <p:spPr>
+          <a:xfrm>
+            <a:off x="9075623" y="91440"/>
+            <a:ext cx="2567432" cy="274320"/>
+          </a:xfrm>
+          <a:prstGeom prst="rect">
+            <a:avLst/>
+          </a:prstGeom>
+          <a:solidFill>
+            <a:srgbClr val="E0F2FE"/>
+          </a:solidFill>
+          <a:ln w="12700">
+            <a:solidFill>
+              <a:srgbClr val="0369A1"/>
+            </a:solidFill>
+            <a:prstDash val="solid"/>
+          </a:ln>
+        </p:spPr>
+      </p:sp>
+      <p:sp>
+        <p:nvSpPr>
+          <p:cNvPr id="9" name="Shape 6"/>
+          <p:cNvSpPr/>
+          <p:nvPr/>
+        </p:nvSpPr>
+        <p:spPr>
+          <a:xfrm>
+            <a:off x="9075623" y="91440"/>
+            <a:ext cx="73152" cy="274320"/>
+          </a:xfrm>
+          <a:prstGeom prst="rect">
+            <a:avLst/>
+          </a:prstGeom>
+          <a:solidFill>
+            <a:srgbClr val="0369A1"/>
+          </a:solidFill>
+          <a:ln w="12700">
+            <a:solidFill>
+              <a:srgbClr val="0369A1"/>
+            </a:solidFill>
+            <a:prstDash val="solid"/>
+          </a:ln>
+        </p:spPr>
+      </p:sp>
       <p:pic>
         <p:nvPicPr>
-          <p:cNvPr id="9" name="Image 0" descr="preencoded.png">    </p:cNvPr>
+          <p:cNvPr id="10" name="Image 0" descr="preencoded.png">    </p:cNvPr>
           <p:cNvPicPr>
             <a:picLocks noChangeAspect="1"/>
           </p:cNvPicPr>
@@ -34947,6 +36952,83 @@
         </p:nvPicPr>
         <p:blipFill>
           <a:blip r:embed="rId1"/>
+          <a:stretch>
+            <a:fillRect/>
+          </a:stretch>
+        </p:blipFill>
+        <p:spPr>
+          <a:xfrm>
+            <a:off x="9203639" y="128016"/>
+            <a:ext cx="201168" cy="201168"/>
+          </a:xfrm>
+          <a:prstGeom prst="rect">
+            <a:avLst/>
+          </a:prstGeom>
+        </p:spPr>
+      </p:pic>
+      <p:sp>
+        <p:nvSpPr>
+          <p:cNvPr id="11" name="Text 7"/>
+          <p:cNvSpPr txBox="1"/>
+          <p:nvPr/>
+        </p:nvSpPr>
+        <p:spPr>
+          <a:xfrm>
+            <a:off x="9459671" y="91440"/>
+            <a:ext cx="2146808" cy="274320"/>
+          </a:xfrm>
+          <a:prstGeom prst="rect">
+            <a:avLst/>
+          </a:prstGeom>
+          <a:noFill/>
+          <a:ln/>
+        </p:spPr>
+        <p:txBody>
+          <a:bodyPr wrap="square" lIns="0" tIns="0" rIns="0" bIns="0" rtlCol="0" anchor="ctr"/>
+          <a:lstStyle/>
+          <a:p>
+            <a:pPr indent="0" marL="0">
+              <a:buNone/>
+            </a:pPr>
+            <a:r>
+              <a:rPr lang="en-US" sz="1100" b="1" dirty="0">
+                <a:solidFill>
+                  <a:srgbClr val="075985"/>
+                </a:solidFill>
+                <a:latin typeface="Calibri" pitchFamily="34" charset="0"/>
+                <a:ea typeface="Calibri" pitchFamily="34" charset="-122"/>
+                <a:cs typeface="Calibri" pitchFamily="34" charset="-120"/>
+              </a:rPr>
+              <a:t>UNDERSTAND NOW</a:t>
+            </a:r>
+            <a:pPr indent="0" marL="0">
+              <a:buNone/>
+            </a:pPr>
+            <a:r>
+              <a:rPr lang="en-US" sz="1100" dirty="0">
+                <a:solidFill>
+                  <a:srgbClr val="075985"/>
+                </a:solidFill>
+                <a:latin typeface="Calibri" pitchFamily="34" charset="0"/>
+                <a:ea typeface="Calibri" pitchFamily="34" charset="-122"/>
+                <a:cs typeface="Calibri" pitchFamily="34" charset="-120"/>
+              </a:rPr>
+              <a:t> · the adder</a:t>
+            </a:r>
+            <a:endParaRPr lang="en-US" sz="1100" dirty="0"/>
+          </a:p>
+        </p:txBody>
+      </p:sp>
+      <p:pic>
+        <p:nvPicPr>
+          <p:cNvPr id="13" name="Image 1" descr="preencoded.png">    </p:cNvPr>
+          <p:cNvPicPr>
+            <a:picLocks noChangeAspect="1"/>
+          </p:cNvPicPr>
+          <p:nvPr/>
+        </p:nvPicPr>
+        <p:blipFill>
+          <a:blip r:embed="rId2"/>
           <a:stretch>
             <a:fillRect/>
           </a:stretch>
@@ -35380,6 +37462,133 @@
               <a:t>A maxterm is 0 for exactly one row of the truth table</a:t>
             </a:r>
             <a:endParaRPr lang="en-US" sz="2400" dirty="0"/>
+          </a:p>
+        </p:txBody>
+      </p:sp>
+      <p:sp>
+        <p:nvSpPr>
+          <p:cNvPr id="11" name="Shape 9"/>
+          <p:cNvSpPr/>
+          <p:nvPr/>
+        </p:nvSpPr>
+        <p:spPr>
+          <a:xfrm>
+            <a:off x="8681669" y="91440"/>
+            <a:ext cx="2961386" cy="274320"/>
+          </a:xfrm>
+          <a:prstGeom prst="rect">
+            <a:avLst/>
+          </a:prstGeom>
+          <a:solidFill>
+            <a:srgbClr val="E0F2FE"/>
+          </a:solidFill>
+          <a:ln w="12700">
+            <a:solidFill>
+              <a:srgbClr val="0369A1"/>
+            </a:solidFill>
+            <a:prstDash val="solid"/>
+          </a:ln>
+        </p:spPr>
+      </p:sp>
+      <p:sp>
+        <p:nvSpPr>
+          <p:cNvPr id="12" name="Shape 10"/>
+          <p:cNvSpPr/>
+          <p:nvPr/>
+        </p:nvSpPr>
+        <p:spPr>
+          <a:xfrm>
+            <a:off x="8681669" y="91440"/>
+            <a:ext cx="73152" cy="274320"/>
+          </a:xfrm>
+          <a:prstGeom prst="rect">
+            <a:avLst/>
+          </a:prstGeom>
+          <a:solidFill>
+            <a:srgbClr val="0369A1"/>
+          </a:solidFill>
+          <a:ln w="12700">
+            <a:solidFill>
+              <a:srgbClr val="0369A1"/>
+            </a:solidFill>
+            <a:prstDash val="solid"/>
+          </a:ln>
+        </p:spPr>
+      </p:sp>
+      <p:pic>
+        <p:nvPicPr>
+          <p:cNvPr id="13" name="Image 0" descr="preencoded.png">    </p:cNvPr>
+          <p:cNvPicPr>
+            <a:picLocks noChangeAspect="1"/>
+          </p:cNvPicPr>
+          <p:nvPr/>
+        </p:nvPicPr>
+        <p:blipFill>
+          <a:blip r:embed="rId1"/>
+          <a:stretch>
+            <a:fillRect/>
+          </a:stretch>
+        </p:blipFill>
+        <p:spPr>
+          <a:xfrm>
+            <a:off x="8809685" y="128016"/>
+            <a:ext cx="201168" cy="201168"/>
+          </a:xfrm>
+          <a:prstGeom prst="rect">
+            <a:avLst/>
+          </a:prstGeom>
+        </p:spPr>
+      </p:pic>
+      <p:sp>
+        <p:nvSpPr>
+          <p:cNvPr id="14" name="Text 11"/>
+          <p:cNvSpPr txBox="1"/>
+          <p:nvPr/>
+        </p:nvSpPr>
+        <p:spPr>
+          <a:xfrm>
+            <a:off x="9065717" y="91440"/>
+            <a:ext cx="2540762" cy="274320"/>
+          </a:xfrm>
+          <a:prstGeom prst="rect">
+            <a:avLst/>
+          </a:prstGeom>
+          <a:noFill/>
+          <a:ln/>
+        </p:spPr>
+        <p:txBody>
+          <a:bodyPr wrap="square" lIns="0" tIns="0" rIns="0" bIns="0" rtlCol="0" anchor="ctr"/>
+          <a:lstStyle/>
+          <a:p>
+            <a:pPr indent="0" marL="0">
+              <a:buNone/>
+            </a:pPr>
+            <a:r>
+              <a:rPr lang="en-US" sz="1100" b="1" dirty="0">
+                <a:solidFill>
+                  <a:srgbClr val="075985"/>
+                </a:solidFill>
+                <a:latin typeface="Calibri" pitchFamily="34" charset="0"/>
+                <a:ea typeface="Calibri" pitchFamily="34" charset="-122"/>
+                <a:cs typeface="Calibri" pitchFamily="34" charset="-120"/>
+              </a:rPr>
+              <a:t>UNDERSTAND NOW</a:t>
+            </a:r>
+            <a:pPr indent="0" marL="0">
+              <a:buNone/>
+            </a:pPr>
+            <a:r>
+              <a:rPr lang="en-US" sz="1100" dirty="0">
+                <a:solidFill>
+                  <a:srgbClr val="075985"/>
+                </a:solidFill>
+                <a:latin typeface="Calibri" pitchFamily="34" charset="0"/>
+                <a:ea typeface="Calibri" pitchFamily="34" charset="-122"/>
+                <a:cs typeface="Calibri" pitchFamily="34" charset="-120"/>
+              </a:rPr>
+              <a:t> · canonical forms</a:t>
+            </a:r>
+            <a:endParaRPr lang="en-US" sz="1100" dirty="0"/>
           </a:p>
         </p:txBody>
       </p:sp>

--- a/en/slides/09-Computer_Architecture-Boolean_Algebra_2.pptx
+++ b/en/slides/09-Computer_Architecture-Boolean_Algebra_2.pptx
@@ -126,13 +126,13 @@
   <p:extLst>
     <p:ext uri="{521415D9-36F7-43E2-AB2F-B90AF26B5E84}">
       <p14:sectionLst xmlns:p14="http://schemas.microsoft.com/office/powerpoint/2010/main">
-        <p14:section name="Opening" id="{f17bc709-5ce0-5d2c-1ca2-19745d2c6dc8}">
+        <p14:section name="Opening" id="{fa632955-0bc8-a4c1-34b7-f2760bd6795c}">
           <p14:sldIdLst>
             <p14:sldId id="256"/>
             <p14:sldId id="257"/>
           </p14:sldIdLst>
         </p14:section>
-        <p14:section name="Boolean functions" id="{f7c60062-e2c4-c936-f11d-73bbc6e07350}">
+        <p14:section name="Boolean functions" id="{5c586c0c-cef2-70eb-679d-50d8f8b7abf2}">
           <p14:sldIdLst>
             <p14:sldId id="258"/>
             <p14:sldId id="259"/>
@@ -142,14 +142,14 @@
             <p14:sldId id="263"/>
           </p14:sldIdLst>
         </p14:section>
-        <p14:section name="Canonical forms" id="{cdfdba98-264d-5f04-6b21-dc387de1a467}">
+        <p14:section name="Canonical forms" id="{09a09899-081f-a43a-8d4b-aec286aae67e}">
           <p14:sldIdLst>
             <p14:sldId id="264"/>
             <p14:sldId id="265"/>
             <p14:sldId id="266"/>
           </p14:sldIdLst>
         </p14:section>
-        <p14:section name="Karnaugh maps" id="{77d5b69d-a096-65ee-5780-16e18cf4a440}">
+        <p14:section name="Karnaugh maps" id="{a4602a70-e10b-0190-4e65-69ed4229ef76}">
           <p14:sldIdLst>
             <p14:sldId id="267"/>
             <p14:sldId id="268"/>
@@ -157,7 +157,7 @@
             <p14:sldId id="270"/>
           </p14:sldIdLst>
         </p14:section>
-        <p14:section name="Back to the machine" id="{f1351356-f94a-6ebe-e2b5-c081e36ad315}">
+        <p14:section name="Back to the machine" id="{be46b06e-7cfe-c5cc-d42a-da31832c54b1}">
           <p14:sldIdLst>
             <p14:sldId id="271"/>
             <p14:sldId id="272"/>

--- a/en/slides/09-Computer_Architecture-Boolean_Algebra_2.pptx
+++ b/en/slides/09-Computer_Architecture-Boolean_Algebra_2.pptx
@@ -126,13 +126,13 @@
   <p:extLst>
     <p:ext uri="{521415D9-36F7-43E2-AB2F-B90AF26B5E84}">
       <p14:sectionLst xmlns:p14="http://schemas.microsoft.com/office/powerpoint/2010/main">
-        <p14:section name="Opening" id="{fa632955-0bc8-a4c1-34b7-f2760bd6795c}">
+        <p14:section name="Opening" id="{7b7a018a-8226-e959-e961-7892bcf4a799}">
           <p14:sldIdLst>
             <p14:sldId id="256"/>
             <p14:sldId id="257"/>
           </p14:sldIdLst>
         </p14:section>
-        <p14:section name="Boolean functions" id="{5c586c0c-cef2-70eb-679d-50d8f8b7abf2}">
+        <p14:section name="Boolean functions" id="{478c3656-2f5f-0cf8-048e-d77a2c75f19c}">
           <p14:sldIdLst>
             <p14:sldId id="258"/>
             <p14:sldId id="259"/>
@@ -142,14 +142,14 @@
             <p14:sldId id="263"/>
           </p14:sldIdLst>
         </p14:section>
-        <p14:section name="Canonical forms" id="{09a09899-081f-a43a-8d4b-aec286aae67e}">
+        <p14:section name="Canonical forms" id="{b5b06259-70ec-0773-c6e4-1b9c71d62fe9}">
           <p14:sldIdLst>
             <p14:sldId id="264"/>
             <p14:sldId id="265"/>
             <p14:sldId id="266"/>
           </p14:sldIdLst>
         </p14:section>
-        <p14:section name="Karnaugh maps" id="{a4602a70-e10b-0190-4e65-69ed4229ef76}">
+        <p14:section name="Karnaugh maps" id="{73708bc8-ce9d-d56b-f7d8-613ddde2a09f}">
           <p14:sldIdLst>
             <p14:sldId id="267"/>
             <p14:sldId id="268"/>
@@ -157,7 +157,7 @@
             <p14:sldId id="270"/>
           </p14:sldIdLst>
         </p14:section>
-        <p14:section name="Back to the machine" id="{be46b06e-7cfe-c5cc-d42a-da31832c54b1}">
+        <p14:section name="Back to the machine" id="{47e47b6b-741e-fdb6-f292-748723e04909}">
           <p14:sldIdLst>
             <p14:sldId id="271"/>
             <p14:sldId id="272"/>
@@ -570,7 +570,7 @@
           <a:p>
             <a:r>
               <a:rPr lang="en-US" dirty="0"/>
-              <a:t>The previous lecture gave you operators and properties. This one answers the practical question that follows: given what a circuit must do, how do you find the gates? The answer is a method in three steps, truth table, canonical form and minimisation, and you will apply it to the most important circuit of the course, the adder. The lecture opens with two instructions that add two bits, and it closes with the thirty-two adders that execute every add you have typed.
+              <a:t>The previous lecture supplied operators and their properties. This one addresses the practical question that follows: given what a circuit must do, how are its gates found? The answer is a method in three steps, truth table, canonical form and minimisation, applied to the most important circuit of the course, the adder. The lecture opens with two instructions that add two bits, and closes with the thirty-two adders that execute every add written so far. It thus passes from the algebra as a calculus to the algebra as a design method.
 Learning status: UNDERSTAND NOW, by the end of this lecture you explain it, trace it and apply it on your own; USE NOW, you follow and use the recipe today; how it works inside is explained later, or is not part of the course; UNDERSTAND LATER, recognise the name and what it is for; a later lecture explains it. A slide without a badge is context: a story, an example, a question, an exercise.
 Learning status of this lecture. UNDERSTAND NOW: the adder; Boolean functions; canonical forms; minimisation, Karnaugh maps. USE NOW: the complete program, the PRG32 tools (used, not studied, in this course). UNDERSTAND LATER: nothing. A slide without a badge is context: a story, an example, a question, an exercise.
 For the lecturer: Spiral: the lecture opens with two instructions that add two bits, shows that they are a half adder, then develops the method (truth table, canonical form, minimisation) that produces such circuits, and closes on the 32-bit adder behind the add instruction.</a:t>
@@ -661,7 +661,7 @@
           <a:p>
             <a:r>
               <a:rPr lang="en-US" dirty="0"/>
-              <a:t>The recipe applied to F. For each row where F is 1, write its minterm; the OR of these minterms is the canonical form P: F is the sum of minterms 3, 4, 5, 6 and 7. For each row where F is 0, write its maxterm; the AND of these maxterms is the canonical form S: the product of maxterms 0, 1 and 2. Both expressions are correct and unique. Neither is economical: the first has five clauses and fifteen literals.
+              <a:t>The procedure applied to F. For each row in which F is 1 its minterm is written, and the OR of these minterms is the canonical form P: F is the sum of minterms 3, 4, 5, 6 and 7. For each row in which F is 0 its maxterm is written, and the AND of these maxterms is the canonical form S: the product of maxterms 0, 1 and 2. Both expressions are correct and unique, which is their theoretical value; neither is economical, since the first has five clauses and fifteen literals.
 UNDERSTAND NOW: canonical forms.
 For the lecturer: Every function has exactly one canonical form of each type (up to the order of the terms). This is synthesis by recipe: always possible, rarely economical.</a:t>
             </a:r>
@@ -751,7 +751,7 @@
           <a:p>
             <a:r>
               <a:rPr lang="en-US" dirty="0"/>
-              <a:t>The canonical form of F reduced step by step with the laws of Lecture 08. Collect A from four clauses; collect again inside the parenthesis; apply the complement law twice; finally apply the simplification x + x'y = x + y. Fifteen literals become three: F = A + BC. It works, but notice what the caption says: at each step you had to see which law to apply. For a larger function that is not practical. A method is needed that does not depend on inspiration.
+              <a:t>The canonical form of F reduced step by step with the laws of Lecture 08. A is factored from four clauses; a second factoring takes place within the parenthesis; the complement law is applied twice; finally the simplification x + x'y = x + y. Fifteen literals become three: F = A + BC. The method works, but the caption identifies its weakness: at every step one had to see which law to apply. For larger functions this is impractical, and a method independent of insight is required.
 UNDERSTAND NOW: canonical forms.
 For the lecturer: From five AND gates with three inputs and a five-input OR, to one AND and one OR. The source deck called this an 'empirical' minimisation: it works, but which law to apply next is left to intuition. Karnaugh maps make it mechanical.</a:t>
             </a:r>
@@ -841,7 +841,7 @@
           <a:p>
             <a:r>
               <a:rPr lang="en-US" dirty="0"/>
-              <a:t>A Karnaugh map is the truth table redrawn as a grid, with one cell for each row. The essential point is the order of the cells: two neighbouring cells differ in the value of one variable only, which is why the columns are labelled 00, 01, 11, 10 and not in counting order. Because of this, two adjacent 1s can be merged into a single clause with one literal less. The rule: group the 1s in rectangles of 1, 2, 4 or 8 cells, as large as possible, until every 1 is covered. The left and right edges are adjacent too.
+              <a:t>A Karnaugh map is the truth table redrawn as a grid, one cell per row. Its essential feature is the ordering of the cells: any two neighbouring cells differ in the value of exactly one variable, which is why the columns are labelled 00, 01, 11, 10 (a Gray code) rather than in counting order. Consequently two adjacent 1s can be merged into a single clause with one literal fewer, by the law xy + xy' = x. The rule is to group the 1s into rectangles of 1, 2, 4 or 8 cells, each as large as possible, until every 1 is covered. The left and right edges are also adjacent.
 UNDERSTAND NOW: minimisation, Karnaugh maps.
 For the lecturer: The order 00, 01, 11, 10 is a Gray code. Maurice Karnaugh, 1953. An online tool was suggested in the source deck (edutecnica.it/apps/k/k.htm).</a:t>
             </a:r>
@@ -931,7 +931,7 @@
           <a:p>
             <a:r>
               <a:rPr lang="en-US" dirty="0"/>
-              <a:t>The function F of the lecture on a map of three variables. Write 1 in the cells of minterms 3, 4, 5, 6 and 7. The red group takes the whole row A = 1, four cells: two variables change, B and C, and the clause is A. The violet group takes the column BC = 11: A changes, and the clause is BC. Every 1 is covered and no group can be enlarged: F = A + BC. It is the result of the algebraic minimisation, found by eye in a few seconds.
+              <a:t>The function F placed on a three-variable map. 1s are written in the cells of minterms 3, 4, 5, 6 and 7. The red group covers the whole row A = 1, four cells in which both B and C vary, so the clause is A. The violet group covers the column BC = 11, in which A varies, so the clause is BC. Every 1 is covered and no group can be enlarged: F = A + BC. This is the result of the algebraic minimisation, obtained by inspection in a few seconds.
 UNDERSTAND NOW: minimisation, Karnaugh maps.
 For the lecturer: A group of 2^k cells eliminates k variables. Always take the largest groups first, then cover what is left.</a:t>
             </a:r>
@@ -1021,7 +1021,7 @@
           <a:p>
             <a:r>
               <a:rPr lang="en-US" dirty="0"/>
-              <a:t>With four variables the map has sixteen cells, and both pairs of labels follow the order 00, 01, 11, 10. The red group of four in the centre gives BD. The four corners form one group as well, because the map wraps around in both directions: imagine it drawn on the surface of a doughnut. In the corners B and D are both 0, so the clause is B'D'. The result has four literals instead of thirty-two. Always look at the edges and the corners before concluding that a 1 is isolated.
+              <a:t>With four variables the map has sixteen cells, and both sets of labels follow the order 00, 01, 11, 10. The central red group of four yields BD. The four corners also form a group, because the map wraps around in both directions, as if drawn on the surface of a torus. In the corners B and D are both 0, so the clause is B'D'. The result has four literals instead of thirty-two. Before concluding that a 1 is isolated, the edges and corners should always be examined.
 UNDERSTAND NOW: minimisation, Karnaugh maps.
 For the lecturer: New slide. Think of the map as drawn on a torus: the top edge touches the bottom edge and the left edge touches the right edge.</a:t>
             </a:r>
@@ -1111,7 +1111,7 @@
           <a:p>
             <a:r>
               <a:rPr lang="en-US" dirty="0"/>
-              <a:t>Sometimes a combination of inputs can never occur, or the output does not matter when it does. A decimal digit coded on four bits uses only ten of the sixteen patterns: the other six never appear. Their cells are marked with an x, a don't care, and each x may be read as 1 or as 0, whichever is more convenient. Use an x as 1 when it lets you make a group larger; ignore it otherwise. More freedom means larger groups and a cheaper circuit.
+              <a:t>Some input combinations can never occur, or their output is irrelevant when they do. A decimal digit encoded on four bits uses only ten of the sixteen patterns, and the other six never appear. Their cells are marked x, a don't care, and each x may be treated as 1 or as 0, whichever is more advantageous: as 1 when it enlarges a group, and otherwise ignored. Greater freedom yields larger groups and therefore a cheaper circuit. Lecture 11 meets this situation in binary-coded decimal and the seven-segment display.
 UNDERSTAND NOW: minimisation, Karnaugh maps.
 For the lecturer: New slide. Typical exam exercise: the seven-segment display decoder, where each segment is a function of four variables with six don't-cares.</a:t>
             </a:r>
@@ -1201,7 +1201,7 @@
           <a:p>
             <a:r>
               <a:rPr lang="en-US" dirty="0"/>
-              <a:t>Put thirty-two full adders in a row, one per bit position. Each receives one bit of A, one bit of B and the carry from the position on its right, and passes its own carry to the left: a ripple-carry adder. This is what executes add t2, t0, t1. The first carry in is 0. For a subtraction the same adder is used: the second operand is complemented and the first carry in is 1, which is the two's complement of Lecture 05. The carry out of the last position is simply dropped.
+              <a:t>Thirty-two full adders are placed in a row, one per bit position. Each receives one bit of A, one bit of B and the carry from the position to its right, and passes its own carry to the left: this is a ripple-carry adder, and it is what executes add t2, t0, t1. The first incoming carry is 0. Subtraction uses the same adder: the second operand is complemented and the first incoming carry set to 1, which is exactly the two's complement negation of Lecture 05. The carry out of the last position is discarded. The carry must traverse all thirty-two stages, a delay whose consequences Lecture 11 examines.
 UNDERSTAND NOW: the adder.
 For the lecturer: The carry out of bit 31 is the unsigned overflow of Lecture 05, which RISC-V simply drops. Real processors use faster carry schemes (carry look-ahead), but the function computed is the same.</a:t>
             </a:r>
@@ -1291,8 +1291,8 @@
           <a:p>
             <a:r>
               <a:rPr lang="en-US" dirty="0"/>
-              <a:t>Use the formula for the number of functions with n equal to 3. Do the exponent first: 2 to the 3 is 8, the number of rows of the truth table; then 2 to the 8.
-Write 5 in binary on three bits: 101. In a minterm a variable appears plain where the row has a 1 and complemented where it has a 0. Discard at once the option with plus signs: that is a sum, so it cannot be a minterm.
+              <a:t>For the first question the formula for the number of functions is applied with n = 3, evaluating the exponent first: 2^3 = 8 is the number of rows of the truth table, and the answer is 2^8.
+For the second, 5 is written in binary on three bits, 101. In a minterm a variable appears uncomplemented where the row has 1 and complemented where it has 0. The option containing plus signs can be discarded at once: it is a sum and therefore cannot be a minterm.
 For the lecturer: 1. Answer: D. 2^(2^3) = 2^8 = 256.
 2. Answer: B. Row 5 is 101: A = 1, B = 0, C = 1, so the minterm is A B' C.</a:t>
             </a:r>
@@ -1382,8 +1382,8 @@
           <a:p>
             <a:r>
               <a:rPr lang="en-US" dirty="0"/>
-              <a:t>A group of 2 to the k cells eliminates k variables. Four is 2 squared. Check it on the map of three variables: the row of four 1s lost both B and C.
-Look at the table of the full adder. The carry out is 1 in the rows with two or three 1s among the inputs: it is the majority function. "An odd number of 1s" describes the other output, the sum bit.
+              <a:t>For the first question: a group of 2^k cells eliminates k variables, and four is 2^2. The three-variable map confirms it: the row of four 1s lost both B and C.
+For the second, the table of the full adder is consulted. The carry out is 1 in the rows with two or three 1s among the inputs: it is the majority function. "An odd number of 1s" describes the other output, the sum bit.
 For the lecturer: 1. Answer: B. A group of 2^k cells eliminates k variables: four cells, two variables.
 2. Answer: C. Cout is the majority function: AB + Cin(A xor B) = AB + ACin + BCin. An odd number of 1s describes the sum bit S instead.</a:t>
             </a:r>
@@ -1473,7 +1473,7 @@
           <a:p>
             <a:r>
               <a:rPr lang="en-US" dirty="0"/>
-              <a:t>Twelve terms. In Italian the canonical forms are named with the letters P, for prodotti, and S, for somme; English texts say SOP and POS. The half adder is the semisommatore and the full adder the sommatore completo. A don't care is a condizione di indifferenza. The ripple-carry adder is the adder in which the carry propagates from one position to the next.</a:t>
+              <a:t>Twelve terms. In Italian the canonical forms are designated P, for prodotti, and S, for somme; English texts use SOP and POS. The half adder is the semisommatore, the full adder the sommatore completo. A don't care is a condizione di indifferenza. The ripple-carry adder is the adder in which the carry propagates from each position to the next.</a:t>
             </a:r>
             <a:endParaRPr lang="en-US" dirty="0"/>
           </a:p>
@@ -1561,7 +1561,7 @@
           <a:p>
             <a:r>
               <a:rPr lang="en-US" dirty="0"/>
-              <a:t>Five objectives. Know the vocabulary: literal, clause, factor, minterm, maxterm. Say how many Boolean functions of n variables exist. Write a function in its two canonical forms starting from the truth table. Minimise a function of up to four variables with a Karnaugh map: this is the skill that the midterm and the laboratory exercise most. And derive the half adder and the full adder, explaining how thirty-two of them carry out an addition.</a:t>
+              <a:t>Five learning outcomes. Mastering the vocabulary: literal, clause, factor, minterm, maxterm. Stating how many Boolean functions of n variables exist. Writing a function in both canonical forms from its truth table. Minimising a function of up to four variables with a Karnaugh map, the skill most exercised by the midterm and the laboratory. And deriving the half adder and the full adder, then explaining how thirty-two of them perform an addition.</a:t>
             </a:r>
             <a:endParaRPr lang="en-US" dirty="0"/>
           </a:p>
@@ -1649,7 +1649,7 @@
           <a:p>
             <a:r>
               <a:rPr lang="en-US" dirty="0"/>
-              <a:t>Five conclusions. A Boolean function is a truth table, and a truth table always yields a canonical expression. Minimisation optimises the network to make it cheaper. Karnaugh maps turn the algebra into a picture: group the 1s and read the clauses. The half adder and the full adder are the first real circuits of the course. And thirty-two full adders in a row execute the add you typed in the first lecture. Next: what the gates themselves are made of.
+              <a:t>Five conclusions. A Boolean function is a truth table, and a truth table always yields a canonical expression. Minimisation optimises the network and reduces its cost. Karnaugh maps turn the algebra into a visual procedure: group the 1s and read off the clauses. The half adder and the full adder are the first genuine circuits of the course. And thirty-two full adders in a row execute the add typed in the first programming lecture. The next lecture asks what the gates themselves are made of.
 Learning status, recap. UNDERSTAND NOW: the adder; Boolean functions; canonical forms; minimisation, Karnaugh maps. USE NOW: the complete program, the PRG32 tools (used, not studied, in this course). UNDERSTAND LATER: nothing. A slide without a badge is context: a story, an example, a question, an exercise.
 For the lecturer: Next lecture: electronics, to see what these gates are made of; then combinational and sequential machines.</a:t>
             </a:r>
@@ -1739,7 +1739,7 @@
           <a:p>
             <a:r>
               <a:rPr lang="en-US" dirty="0"/>
-              <a:t>Three words. A literal is a variable or its complement as it appears in an expression: a, b', x. A clause, or product term, is a logical product of literals: a b' x. A factor, or sum term, is a logical sum of literals: (a + x'). The number of literals is a measure of the cost of an expression, because each occurrence of a variable is an input of some gate. You will count literals to compare two forms of the same function.
+              <a:t>Three terms. A literal is a variable, or its complement, as it occurs in an expression: a, b', x. A clause, or product term, is a logical product of literals: a b' x. A factor, or sum term, is a logical sum of literals: (a + x'). The number of literals is a first measure of the cost of an expression, because each occurrence of a variable is an input to some gate; counting literals is how two forms of the same function will be compared.
 UNDERSTAND NOW: Boolean functions.
 For the lecturer: Letterale; clausola o termine elementare; fattore elementare. Each occurrence of a variable counts as a literal: the number of literals measures the cost of an expression.</a:t>
             </a:r>
@@ -1829,7 +1829,7 @@
           <a:p>
             <a:r>
               <a:rPr lang="en-US" dirty="0"/>
-              <a:t>A Boolean function assigns a 0 or a 1 to each combination of its n inputs. The combinations are 2 to the n, and for each of them there are two possible outputs: so the functions are 2 to the power 2 to the n. With one variable there are 4, with two 16, with three 256, with four 65,536. The number is finite but grows extremely fast. The last line is the reason for studying all this: every digital circuit can be written as an expression, and every expression can be built as a circuit.
+              <a:t>A Boolean function assigns 0 or 1 to each combination of its n inputs. There are 2^n combinations, and for each of them two possible outputs, so the number of distinct functions is 2^(2^n): 4 for one variable, 16 for two, 256 for three, 65,536 for four. The number is finite but grows doubly exponentially. The last line states why the subject matters: every digital circuit can be written as a Boolean expression, and every Boolean expression can be built as a circuit. The correspondence between algebra and hardware is exact.
 UNDERSTAND NOW: Boolean functions.
 For the lecturer: f: B^n -&gt; B with B = {0, 1}. For n = 5 there are already more than four billion functions: 2^32.</a:t>
             </a:r>
@@ -1919,7 +1919,7 @@
           <a:p>
             <a:r>
               <a:rPr lang="en-US" dirty="0"/>
-              <a:t>All sixteen functions of two variables. Each row is a function, and the four middle columns are its outputs for the inputs 00, 01, 10 and 11; the number of the function is that column of outputs read as a binary number. Among them you recognise, highlighted, the gates of Lecture 08: AND is f1, XOR is f6, OR is f7, NOR is f8, XNOR is f9, NAND is f14. The others are the two constants, the two inputs passed unchanged, their negations, and four less common functions.
+              <a:t>All sixteen functions of two variables. Each row is a function, the four central columns giving its outputs for the inputs 00, 01, 10 and 11; the index of the function is that column of outputs read as a binary number. The gates of Lecture 08 appear among them, highlighted: AND is f1, XOR is f6, OR is f7, NOR is f8, XNOR is f9, NAND is f14. The remainder comprise the two constants, the two inputs passed through unchanged, their negations, and four less common functions such as implication.
 UNDERSTAND NOW: Boolean functions.
 For the lecturer: f0 and f15: constants. f3, f5: identity (buffer). f12, f10: NOT. f1 AND, f7 OR, f6 XOR, f9 equivalence, f14 NAND, f8 NOR. f13 is the implication x -&gt; y, f11 is y -&gt; x; f2 and f4 are the inhibitions.</a:t>
             </a:r>
@@ -2009,7 +2009,7 @@
           <a:p>
             <a:r>
               <a:rPr lang="en-US" dirty="0"/>
-              <a:t>A set of operators is functionally complete if every Boolean function can be built with it. AND, OR and NOT are complete. By De Morgan's laws one of AND and OR can be obtained from the other with NOT, so two operators are enough. The surprising fact is the last one: NAND alone is complete, and so is NOR alone. A single type of gate is enough to build any digital circuit, a whole processor included; this is why NAND and NOR are called universal gates.
+              <a:t>A set of operators is functionally complete if every Boolean function can be expressed with it alone. AND, OR and NOT form a complete set. Since De Morgan's laws allow either AND or OR to be obtained from the other with the help of NOT, two operators suffice. The remarkable fact comes last: NAND alone is complete, and so is NOR alone. A single type of gate is sufficient to construct any digital circuit, an entire processor included, which is why NAND and NOR are called universal gates. Lecture 10 shows why this matters economically.
 UNDERSTAND NOW: Boolean functions.
 For the lecturer: NOT x = x NAND x; x AND y = (x NAND y) NAND (x NAND y); x OR y = (x NAND x) NAND (y NAND y). Real chips are largely built from NAND and NOR because they need the fewest transistors.</a:t>
             </a:r>
@@ -2099,7 +2099,7 @@
           <a:p>
             <a:r>
               <a:rPr lang="en-US" dirty="0"/>
-              <a:t>The half adder adds two bits A and B and produces a sum bit S and a carry C. From the table, S is 1 when the inputs are different, which is the XOR, and C is 1 when both are 1, which is the AND. The circuit on the right is exactly the two instructions of the warm-up. It is called "half" because it has no input for a carry coming from a previous position, so by itself it can only add the least significant bits of two numbers.
+              <a:t>The half adder adds two bits A and B and produces a sum bit S and a carry C. The truth table shows that S is 1 when the inputs differ, which is XOR, and that C is 1 when both are 1, which is AND. The circuit on the right corresponds exactly to the two instructions of the warm-up. It is called "half" because it has no input for a carry from a less significant position, so on its own it can add only the least significant bits of two numbers.
 UNDERSTAND NOW: the adder.
 For the lecturer: The circuit is exactly the two instructions of the warm-up. 'Half' because it has no carry input: it can only add the least significant bits.</a:t>
             </a:r>
@@ -2189,7 +2189,7 @@
           <a:p>
             <a:r>
               <a:rPr lang="en-US" dirty="0"/>
-              <a:t>The full adder has three inputs: the two bits A and B and a carry in. It produces a sum bit and a carry out. Read the table: S is 1 when an odd number of inputs is 1; the carry out is 1 when at least two inputs are 1. The circuit is made of two half adders and an OR: the first adds A and B, the second adds the carry in to their sum, and the OR combines the two possible carries. In the drawing, wires that cross without a dot are not connected.
+              <a:t>The full adder has three inputs, the two operand bits A and B and an incoming carry, and two outputs, a sum bit and an outgoing carry. From the table, S is 1 when an odd number of inputs is 1, and the carry out is 1 when at least two inputs are 1. The circuit consists of two half adders and an OR gate: the first adds A and B, the second adds the incoming carry to their partial sum, and the OR merges the two possible carries, which can never both be 1. In the drawing, wires that cross without a dot are not connected.
 UNDERSTAND NOW: the adder.
 For the lecturer: Two half adders and an OR. S is 1 when an odd number of inputs is 1; Cout is 1 when at least two inputs are 1. Wires that cross without a dot are not connected.</a:t>
             </a:r>
@@ -2279,7 +2279,7 @@
           <a:p>
             <a:r>
               <a:rPr lang="en-US" dirty="0"/>
-              <a:t>A minterm is a product that contains every variable once, complemented or not. Its special property is that it is 1 for exactly one row of the truth table: a'b'c is 1 only when a is 0, b is 0 and c is 1. A maxterm is a sum that contains every variable once, and it is 0 for exactly one row. To write the minterm of a row, complement the variables that are 0 in that row; for the maxterm, complement those that are 1.
+              <a:t>A minterm is a product containing every variable exactly once, complemented or not. Its defining property is that it equals 1 for exactly one row of the truth table: a'b'c is 1 only when a = 0, b = 0 and c = 1. A maxterm is a sum containing every variable exactly once, and it equals 0 for exactly one row. To write the minterm of a row, the variables that are 0 in that row are complemented; for the maxterm, those that are 1. Minterms and maxterms are the building blocks of the canonical forms.
 UNDERSTAND NOW: canonical forms.
 For the lecturer: Mintermine (termine prodotto P); maxtermine (fattore somma S). Minterm i corresponds to row i: a variable appears complemented where the row has a 0.</a:t>
             </a:r>
@@ -3359,7 +3359,7 @@
                 <a:ea typeface="Calibri" pitchFamily="34" charset="-122"/>
                 <a:cs typeface="Calibri" pitchFamily="34" charset="-120"/>
               </a:rPr>
-              <a:t>09-Computer_Architecture-Boolean_Algebra_2-Code.pptx</a:t>
+              <a:t>09-Computer_Architecture-Boolean_Algebra_2-Lab.pptx</a:t>
             </a:r>
             <a:endParaRPr lang="en-US" sz="1300" dirty="0"/>
           </a:p>

--- a/en/slides/09-Computer_Architecture-Boolean_Algebra_2.pptx
+++ b/en/slides/09-Computer_Architecture-Boolean_Algebra_2.pptx
@@ -126,13 +126,13 @@
   <p:extLst>
     <p:ext uri="{521415D9-36F7-43E2-AB2F-B90AF26B5E84}">
       <p14:sectionLst xmlns:p14="http://schemas.microsoft.com/office/powerpoint/2010/main">
-        <p14:section name="Opening" id="{7b7a018a-8226-e959-e961-7892bcf4a799}">
+        <p14:section name="Opening" id="{66f0840a-5943-290b-4a21-85826d84832b}">
           <p14:sldIdLst>
             <p14:sldId id="256"/>
             <p14:sldId id="257"/>
           </p14:sldIdLst>
         </p14:section>
-        <p14:section name="Boolean functions" id="{478c3656-2f5f-0cf8-048e-d77a2c75f19c}">
+        <p14:section name="Boolean functions" id="{11ae3c01-8b89-355a-0001-03d0016096ae}">
           <p14:sldIdLst>
             <p14:sldId id="258"/>
             <p14:sldId id="259"/>
@@ -142,14 +142,14 @@
             <p14:sldId id="263"/>
           </p14:sldIdLst>
         </p14:section>
-        <p14:section name="Canonical forms" id="{b5b06259-70ec-0773-c6e4-1b9c71d62fe9}">
+        <p14:section name="Canonical forms" id="{0ce211f5-220a-57b6-0cbf-b121e1354a64}">
           <p14:sldIdLst>
             <p14:sldId id="264"/>
             <p14:sldId id="265"/>
             <p14:sldId id="266"/>
           </p14:sldIdLst>
         </p14:section>
-        <p14:section name="Karnaugh maps" id="{73708bc8-ce9d-d56b-f7d8-613ddde2a09f}">
+        <p14:section name="Karnaugh maps" id="{74e1913a-1430-0718-a671-d9c9f4c0b858}">
           <p14:sldIdLst>
             <p14:sldId id="267"/>
             <p14:sldId id="268"/>
@@ -157,7 +157,7 @@
             <p14:sldId id="270"/>
           </p14:sldIdLst>
         </p14:section>
-        <p14:section name="Back to the machine" id="{47e47b6b-741e-fdb6-f292-748723e04909}">
+        <p14:section name="Back to the machine" id="{5b37060a-ceec-7870-812a-561fa80474f6}">
           <p14:sldIdLst>
             <p14:sldId id="271"/>
             <p14:sldId id="272"/>

--- a/en/slides/09-Computer_Architecture-Boolean_Algebra_2.pptx
+++ b/en/slides/09-Computer_Architecture-Boolean_Algebra_2.pptx
@@ -126,13 +126,13 @@
   <p:extLst>
     <p:ext uri="{521415D9-36F7-43E2-AB2F-B90AF26B5E84}">
       <p14:sectionLst xmlns:p14="http://schemas.microsoft.com/office/powerpoint/2010/main">
-        <p14:section name="Opening" id="{66f0840a-5943-290b-4a21-85826d84832b}">
+        <p14:section name="Opening" id="{d968c68c-3ab0-23ff-fc8d-cfaadf133be6}">
           <p14:sldIdLst>
             <p14:sldId id="256"/>
             <p14:sldId id="257"/>
           </p14:sldIdLst>
         </p14:section>
-        <p14:section name="Boolean functions" id="{11ae3c01-8b89-355a-0001-03d0016096ae}">
+        <p14:section name="Boolean functions" id="{83df830d-e11d-1c00-24d9-3466e3008e10}">
           <p14:sldIdLst>
             <p14:sldId id="258"/>
             <p14:sldId id="259"/>
@@ -142,14 +142,14 @@
             <p14:sldId id="263"/>
           </p14:sldIdLst>
         </p14:section>
-        <p14:section name="Canonical forms" id="{0ce211f5-220a-57b6-0cbf-b121e1354a64}">
+        <p14:section name="Canonical forms" id="{52a19ebc-513f-f785-5785-6c81979a70cd}">
           <p14:sldIdLst>
             <p14:sldId id="264"/>
             <p14:sldId id="265"/>
             <p14:sldId id="266"/>
           </p14:sldIdLst>
         </p14:section>
-        <p14:section name="Karnaugh maps" id="{74e1913a-1430-0718-a671-d9c9f4c0b858}">
+        <p14:section name="Karnaugh maps" id="{b05d6abc-38a5-eabb-5879-289e841e90dd}">
           <p14:sldIdLst>
             <p14:sldId id="267"/>
             <p14:sldId id="268"/>
@@ -157,7 +157,7 @@
             <p14:sldId id="270"/>
           </p14:sldIdLst>
         </p14:section>
-        <p14:section name="Back to the machine" id="{5b37060a-ceec-7870-812a-561fa80474f6}">
+        <p14:section name="Back to the machine" id="{c3698af7-d7c5-bc18-803c-d6a4e8d7aa0f}">
           <p14:sldIdLst>
             <p14:sldId id="271"/>
             <p14:sldId id="272"/>
@@ -573,6 +573,7 @@
               <a:t>The previous lecture supplied operators and their properties. This one addresses the practical question that follows: given what a circuit must do, how are its gates found? The answer is a method in three steps, truth table, canonical form and minimisation, applied to the most important circuit of the course, the adder. The lecture opens with two instructions that add two bits, and closes with the thirty-two adders that execute every add written so far. It thus passes from the algebra as a calculus to the algebra as a design method.
 Learning status: UNDERSTAND NOW, by the end of this lecture you explain it, trace it and apply it on your own; USE NOW, you follow and use the recipe today; how it works inside is explained later, or is not part of the course; UNDERSTAND LATER, recognise the name and what it is for; a later lecture explains it. A slide without a badge is context: a story, an example, a question, an exercise.
 Learning status of this lecture. UNDERSTAND NOW: the adder; Boolean functions; canonical forms; minimisation, Karnaugh maps. USE NOW: the complete program, the PRG32 tools (used, not studied, in this course). UNDERSTAND LATER: nothing. A slide without a badge is context: a story, an example, a question, an exercise.
+Roadmap. Today's outcomes: (1) write a function in canonical form from its truth table; (2) minimise a function of up to four variables with a Karnaugh map; (3) build a full adder and chain it into an n-bit adder. Builds on: only what Lecture 01 set up. Next: Lecture 10, Introduction to Electronics and Digital Electronics.
 For the lecturer: Spiral: the lecture opens with two instructions that add two bits, shows that they are a half adder, then develops the method (truth table, canonical form, minimisation) that produces such circuits, and closes on the 32-bit adder behind the add instruction.</a:t>
             </a:r>
             <a:endParaRPr lang="en-US" dirty="0"/>
@@ -1650,7 +1651,7 @@
             <a:r>
               <a:rPr lang="en-US" dirty="0"/>
               <a:t>Five conclusions. A Boolean function is a truth table, and a truth table always yields a canonical expression. Minimisation optimises the network and reduces its cost. Karnaugh maps turn the algebra into a visual procedure: group the 1s and read off the clauses. The half adder and the full adder are the first genuine circuits of the course. And thirty-two full adders in a row execute the add typed in the first programming lecture. The next lecture asks what the gates themselves are made of.
-Learning status, recap. UNDERSTAND NOW: the adder; Boolean functions; canonical forms; minimisation, Karnaugh maps. USE NOW: the complete program, the PRG32 tools (used, not studied, in this course). UNDERSTAND LATER: nothing. A slide without a badge is context: a story, an example, a question, an exercise.
+Learning status, recap. UNDERSTAND NOW: the adder; Boolean functions; canonical forms; minimisation, Karnaugh maps. USE NOW: the complete program, the PRG32 tools (used, not studied, in this course). UNDERSTAND LATER: nothing. A slide without a badge is context: a story, an example, a question, an exercise. Closing thread: The add of Lecture 02 is now a circuit you could draw: 32 full adders and a carry that ripples. Next: the electronics that make a gate. Exit ticket (two to four minutes, alone, on paper): 1. A full adder receives A = 1, B = 1, Cin = 1. Give S and Cout. Why does a 32-bit adder need 32 of them, chained? 2. In a Karnaugh map of three variables A, B, C, why can the cells 000 and 010 be grouped, but not 000 and 011? Which term does the first group give?
 For the lecturer: Next lecture: electronics, to see what these gates are made of; then combinational and sequential machines.</a:t>
             </a:r>
             <a:endParaRPr lang="en-US" dirty="0"/>
